--- a/services/web-app/resources/thesis-essay-decks/lesson-1-day-1.pptx
+++ b/services/web-app/resources/thesis-essay-decks/lesson-1-day-1.pptx
@@ -2444,7 +2444,7 @@
       </p:sp>
       <p:pic>
         <p:nvPicPr>
-          <p:cNvPr id="7" name="Image 0" descr="/home/user/yawp/services/web-app/scripts/thesis-essay-decks/assets/icons/lightbulb.png">    </p:cNvPr>
+          <p:cNvPr id="7" name="Image 0" descr="lightbulb icon">    </p:cNvPr>
           <p:cNvPicPr>
             <a:picLocks noChangeAspect="1"/>
           </p:cNvPicPr>
@@ -2493,7 +2493,7 @@
       </p:sp>
       <p:pic>
         <p:nvPicPr>
-          <p:cNvPr id="9" name="Image 1" descr="/home/user/yawp/services/web-app/scripts/thesis-essay-decks/assets/icons/puzzle.png">    </p:cNvPr>
+          <p:cNvPr id="9" name="Image 1" descr="puzzle icon">    </p:cNvPr>
           <p:cNvPicPr>
             <a:picLocks noChangeAspect="1"/>
           </p:cNvPicPr>
@@ -2542,7 +2542,7 @@
       </p:sp>
       <p:pic>
         <p:nvPicPr>
-          <p:cNvPr id="11" name="Image 2" descr="/home/user/yawp/services/web-app/scripts/thesis-essay-decks/assets/icons/thumbs.png">    </p:cNvPr>
+          <p:cNvPr id="11" name="Image 2" descr="thumbs icon">    </p:cNvPr>
           <p:cNvPicPr>
             <a:picLocks noChangeAspect="1"/>
           </p:cNvPicPr>
@@ -3112,7 +3112,7 @@
       </p:sp>
       <p:pic>
         <p:nvPicPr>
-          <p:cNvPr id="5" name="Image 0" descr="/home/user/yawp/services/web-app/scripts/thesis-essay-decks/assets/icons/pencil.png">    </p:cNvPr>
+          <p:cNvPr id="5" name="Image 0" descr="pencil icon">    </p:cNvPr>
           <p:cNvPicPr>
             <a:picLocks noChangeAspect="1"/>
           </p:cNvPicPr>
@@ -3666,9 +3666,6 @@
               </a:rPr>
               <a:t>What is the </a:t>
             </a:r>
-            <a:pPr indent="0" marL="0">
-              <a:buNone/>
-            </a:pPr>
             <a:r>
               <a:rPr lang="en-US" sz="2600" dirty="0">
                 <a:solidFill>
@@ -3874,7 +3871,7 @@
       </p:sp>
       <p:pic>
         <p:nvPicPr>
-          <p:cNvPr id="5" name="Image 0" descr="/home/user/yawp/services/web-app/scripts/thesis-essay-decks/assets/critical-essay-form.png">    </p:cNvPr>
+          <p:cNvPr id="5" name="Image 0" descr="The critical essay form: introduction, body paragraphs and conclusion.">    </p:cNvPr>
           <p:cNvPicPr>
             <a:picLocks noChangeAspect="1"/>
           </p:cNvPicPr>
@@ -4023,9 +4020,6 @@
               </a:rPr>
               <a:t>Thesis statement</a:t>
             </a:r>
-            <a:pPr indent="0" marL="0">
-              <a:buNone/>
-            </a:pPr>
             <a:r>
               <a:rPr lang="en-US" sz="2400" dirty="0">
                 <a:solidFill>
@@ -4347,7 +4341,7 @@
       </p:sp>
       <p:pic>
         <p:nvPicPr>
-          <p:cNvPr id="5" name="Image 0" descr="/home/user/yawp/services/web-app/scripts/thesis-essay-decks/assets/icons/pencil.png">    </p:cNvPr>
+          <p:cNvPr id="5" name="Image 0" descr="pencil icon">    </p:cNvPr>
           <p:cNvPicPr>
             <a:picLocks noChangeAspect="1"/>
           </p:cNvPicPr>
@@ -4454,9 +4448,6 @@
               </a:rPr>
               <a:t>Over the course of our sessions, you will learn how to write a </a:t>
             </a:r>
-            <a:pPr indent="0" marL="0">
-              <a:buNone/>
-            </a:pPr>
             <a:r>
               <a:rPr lang="en-US" sz="2200" dirty="0">
                 <a:solidFill>
@@ -4471,9 +4462,6 @@
               </a:rPr>
               <a:t>thoughtful, original, critical essay</a:t>
             </a:r>
-            <a:pPr indent="0" marL="0">
-              <a:buNone/>
-            </a:pPr>
             <a:r>
               <a:rPr lang="en-US" sz="2200" dirty="0">
                 <a:solidFill>
@@ -5153,7 +5141,7 @@
       </p:sp>
       <p:pic>
         <p:nvPicPr>
-          <p:cNvPr id="5" name="Image 0" descr="/home/user/yawp/services/web-app/scripts/thesis-essay-decks/assets/icons/pencil.png">    </p:cNvPr>
+          <p:cNvPr id="5" name="Image 0" descr="pencil icon">    </p:cNvPr>
           <p:cNvPicPr>
             <a:picLocks noChangeAspect="1"/>
           </p:cNvPicPr>
@@ -5324,9 +5312,6 @@
               </a:rPr>
               <a:t>Open your class in YAWP! and go to its </a:t>
             </a:r>
-            <a:pPr indent="0" marL="0">
-              <a:buNone/>
-            </a:pPr>
             <a:r>
               <a:rPr lang="en-US" sz="2000" dirty="0">
                 <a:solidFill>
@@ -5341,6 +5326,106 @@
               </a:rPr>
               <a:t>Students</a:t>
             </a:r>
+            <a:r>
+              <a:rPr lang="en-US" sz="2000" dirty="0">
+                <a:solidFill>
+                  <a:srgbClr val="3C3828"/>
+                </a:solidFill>
+                <a:latin typeface="Calibri" pitchFamily="34" charset="0"/>
+                <a:ea typeface="Calibri" pitchFamily="34" charset="-122"/>
+                <a:cs typeface="Calibri" pitchFamily="34" charset="-120"/>
+              </a:rPr>
+              <a:t> tab</a:t>
+            </a:r>
+            <a:endParaRPr lang="en-US" sz="2000" dirty="0"/>
+          </a:p>
+        </p:txBody>
+      </p:sp>
+      <p:sp>
+        <p:nvSpPr>
+          <p:cNvPr id="11" name="Shape 8"/>
+          <p:cNvSpPr/>
+          <p:nvPr/>
+        </p:nvSpPr>
+        <p:spPr>
+          <a:xfrm>
+            <a:off x="6324448" y="2075688"/>
+            <a:ext cx="548640" cy="548640"/>
+          </a:xfrm>
+          <a:prstGeom prst="ellipse">
+            <a:avLst/>
+          </a:prstGeom>
+          <a:solidFill>
+            <a:srgbClr val="FFB600"/>
+          </a:solidFill>
+          <a:ln w="12700">
+            <a:solidFill>
+              <a:srgbClr val="FFB600"/>
+            </a:solidFill>
+            <a:prstDash val="solid"/>
+          </a:ln>
+        </p:spPr>
+      </p:sp>
+      <p:sp>
+        <p:nvSpPr>
+          <p:cNvPr id="12" name="Text 9"/>
+          <p:cNvSpPr/>
+          <p:nvPr/>
+        </p:nvSpPr>
+        <p:spPr>
+          <a:xfrm>
+            <a:off x="6324448" y="2075688"/>
+            <a:ext cx="548640" cy="548640"/>
+          </a:xfrm>
+          <a:prstGeom prst="rect">
+            <a:avLst/>
+          </a:prstGeom>
+          <a:noFill/>
+          <a:ln/>
+        </p:spPr>
+        <p:txBody>
+          <a:bodyPr wrap="square" lIns="0" tIns="0" rIns="0" bIns="0" rtlCol="0" anchor="ctr"/>
+          <a:lstStyle/>
+          <a:p>
+            <a:pPr algn="ctr" indent="0" marL="0">
+              <a:buNone/>
+            </a:pPr>
+            <a:r>
+              <a:rPr lang="en-US" sz="2200" b="1" dirty="0">
+                <a:solidFill>
+                  <a:srgbClr val="FFFEFA"/>
+                </a:solidFill>
+                <a:latin typeface="Georgia" pitchFamily="34" charset="0"/>
+                <a:ea typeface="Georgia" pitchFamily="34" charset="-122"/>
+                <a:cs typeface="Georgia" pitchFamily="34" charset="-120"/>
+              </a:rPr>
+              <a:t>2</a:t>
+            </a:r>
+            <a:endParaRPr lang="en-US" sz="2200" dirty="0"/>
+          </a:p>
+        </p:txBody>
+      </p:sp>
+      <p:sp>
+        <p:nvSpPr>
+          <p:cNvPr id="13" name="Text 10"/>
+          <p:cNvSpPr/>
+          <p:nvPr/>
+        </p:nvSpPr>
+        <p:spPr>
+          <a:xfrm>
+            <a:off x="7055968" y="1965960"/>
+            <a:ext cx="4449928" cy="822960"/>
+          </a:xfrm>
+          <a:prstGeom prst="rect">
+            <a:avLst/>
+          </a:prstGeom>
+          <a:noFill/>
+          <a:ln/>
+        </p:spPr>
+        <p:txBody>
+          <a:bodyPr wrap="square" lIns="0" tIns="0" rIns="0" bIns="0" rtlCol="0" anchor="ctr"/>
+          <a:lstStyle/>
+          <a:p>
             <a:pPr indent="0" marL="0">
               <a:buNone/>
             </a:pPr>
@@ -5353,114 +5438,8 @@
                 <a:ea typeface="Calibri" pitchFamily="34" charset="-122"/>
                 <a:cs typeface="Calibri" pitchFamily="34" charset="-120"/>
               </a:rPr>
-              <a:t> tab</a:t>
-            </a:r>
-            <a:endParaRPr lang="en-US" sz="2000" dirty="0"/>
-          </a:p>
-        </p:txBody>
-      </p:sp>
-      <p:sp>
-        <p:nvSpPr>
-          <p:cNvPr id="11" name="Shape 8"/>
-          <p:cNvSpPr/>
-          <p:nvPr/>
-        </p:nvSpPr>
-        <p:spPr>
-          <a:xfrm>
-            <a:off x="6324448" y="2075688"/>
-            <a:ext cx="548640" cy="548640"/>
-          </a:xfrm>
-          <a:prstGeom prst="ellipse">
-            <a:avLst/>
-          </a:prstGeom>
-          <a:solidFill>
-            <a:srgbClr val="FFB600"/>
-          </a:solidFill>
-          <a:ln w="12700">
-            <a:solidFill>
-              <a:srgbClr val="FFB600"/>
-            </a:solidFill>
-            <a:prstDash val="solid"/>
-          </a:ln>
-        </p:spPr>
-      </p:sp>
-      <p:sp>
-        <p:nvSpPr>
-          <p:cNvPr id="12" name="Text 9"/>
-          <p:cNvSpPr/>
-          <p:nvPr/>
-        </p:nvSpPr>
-        <p:spPr>
-          <a:xfrm>
-            <a:off x="6324448" y="2075688"/>
-            <a:ext cx="548640" cy="548640"/>
-          </a:xfrm>
-          <a:prstGeom prst="rect">
-            <a:avLst/>
-          </a:prstGeom>
-          <a:noFill/>
-          <a:ln/>
-        </p:spPr>
-        <p:txBody>
-          <a:bodyPr wrap="square" lIns="0" tIns="0" rIns="0" bIns="0" rtlCol="0" anchor="ctr"/>
-          <a:lstStyle/>
-          <a:p>
-            <a:pPr algn="ctr" indent="0" marL="0">
-              <a:buNone/>
-            </a:pPr>
-            <a:r>
-              <a:rPr lang="en-US" sz="2200" b="1" dirty="0">
-                <a:solidFill>
-                  <a:srgbClr val="FFFEFA"/>
-                </a:solidFill>
-                <a:latin typeface="Georgia" pitchFamily="34" charset="0"/>
-                <a:ea typeface="Georgia" pitchFamily="34" charset="-122"/>
-                <a:cs typeface="Georgia" pitchFamily="34" charset="-120"/>
-              </a:rPr>
-              <a:t>2</a:t>
-            </a:r>
-            <a:endParaRPr lang="en-US" sz="2200" dirty="0"/>
-          </a:p>
-        </p:txBody>
-      </p:sp>
-      <p:sp>
-        <p:nvSpPr>
-          <p:cNvPr id="13" name="Text 10"/>
-          <p:cNvSpPr/>
-          <p:nvPr/>
-        </p:nvSpPr>
-        <p:spPr>
-          <a:xfrm>
-            <a:off x="7055968" y="1965960"/>
-            <a:ext cx="4449928" cy="822960"/>
-          </a:xfrm>
-          <a:prstGeom prst="rect">
-            <a:avLst/>
-          </a:prstGeom>
-          <a:noFill/>
-          <a:ln/>
-        </p:spPr>
-        <p:txBody>
-          <a:bodyPr wrap="square" lIns="0" tIns="0" rIns="0" bIns="0" rtlCol="0" anchor="ctr"/>
-          <a:lstStyle/>
-          <a:p>
-            <a:pPr indent="0" marL="0">
-              <a:buNone/>
-            </a:pPr>
-            <a:r>
-              <a:rPr lang="en-US" sz="2000" dirty="0">
-                <a:solidFill>
-                  <a:srgbClr val="3C3828"/>
-                </a:solidFill>
-                <a:latin typeface="Calibri" pitchFamily="34" charset="0"/>
-                <a:ea typeface="Calibri" pitchFamily="34" charset="-122"/>
-                <a:cs typeface="Calibri" pitchFamily="34" charset="-120"/>
-              </a:rPr>
               <a:t>Copy the </a:t>
             </a:r>
-            <a:pPr indent="0" marL="0">
-              <a:buNone/>
-            </a:pPr>
             <a:r>
               <a:rPr lang="en-US" sz="2000" dirty="0">
                 <a:solidFill>
@@ -5475,6 +5454,106 @@
               </a:rPr>
               <a:t>join link</a:t>
             </a:r>
+            <a:r>
+              <a:rPr lang="en-US" sz="2000" dirty="0">
+                <a:solidFill>
+                  <a:srgbClr val="3C3828"/>
+                </a:solidFill>
+                <a:latin typeface="Calibri" pitchFamily="34" charset="0"/>
+                <a:ea typeface="Calibri" pitchFamily="34" charset="-122"/>
+                <a:cs typeface="Calibri" pitchFamily="34" charset="-120"/>
+              </a:rPr>
+              <a:t>, or put the QR code up on the board</a:t>
+            </a:r>
+            <a:endParaRPr lang="en-US" sz="2000" dirty="0"/>
+          </a:p>
+        </p:txBody>
+      </p:sp>
+      <p:sp>
+        <p:nvSpPr>
+          <p:cNvPr id="14" name="Shape 11"/>
+          <p:cNvSpPr/>
+          <p:nvPr/>
+        </p:nvSpPr>
+        <p:spPr>
+          <a:xfrm>
+            <a:off x="685800" y="2944368"/>
+            <a:ext cx="548640" cy="548640"/>
+          </a:xfrm>
+          <a:prstGeom prst="ellipse">
+            <a:avLst/>
+          </a:prstGeom>
+          <a:solidFill>
+            <a:srgbClr val="FC4540"/>
+          </a:solidFill>
+          <a:ln w="12700">
+            <a:solidFill>
+              <a:srgbClr val="FC4540"/>
+            </a:solidFill>
+            <a:prstDash val="solid"/>
+          </a:ln>
+        </p:spPr>
+      </p:sp>
+      <p:sp>
+        <p:nvSpPr>
+          <p:cNvPr id="15" name="Text 12"/>
+          <p:cNvSpPr/>
+          <p:nvPr/>
+        </p:nvSpPr>
+        <p:spPr>
+          <a:xfrm>
+            <a:off x="685800" y="2944368"/>
+            <a:ext cx="548640" cy="548640"/>
+          </a:xfrm>
+          <a:prstGeom prst="rect">
+            <a:avLst/>
+          </a:prstGeom>
+          <a:noFill/>
+          <a:ln/>
+        </p:spPr>
+        <p:txBody>
+          <a:bodyPr wrap="square" lIns="0" tIns="0" rIns="0" bIns="0" rtlCol="0" anchor="ctr"/>
+          <a:lstStyle/>
+          <a:p>
+            <a:pPr algn="ctr" indent="0" marL="0">
+              <a:buNone/>
+            </a:pPr>
+            <a:r>
+              <a:rPr lang="en-US" sz="2200" b="1" dirty="0">
+                <a:solidFill>
+                  <a:srgbClr val="FFFEFA"/>
+                </a:solidFill>
+                <a:latin typeface="Georgia" pitchFamily="34" charset="0"/>
+                <a:ea typeface="Georgia" pitchFamily="34" charset="-122"/>
+                <a:cs typeface="Georgia" pitchFamily="34" charset="-120"/>
+              </a:rPr>
+              <a:t>3</a:t>
+            </a:r>
+            <a:endParaRPr lang="en-US" sz="2200" dirty="0"/>
+          </a:p>
+        </p:txBody>
+      </p:sp>
+      <p:sp>
+        <p:nvSpPr>
+          <p:cNvPr id="16" name="Text 13"/>
+          <p:cNvSpPr/>
+          <p:nvPr/>
+        </p:nvSpPr>
+        <p:spPr>
+          <a:xfrm>
+            <a:off x="1417320" y="2834640"/>
+            <a:ext cx="4449928" cy="822960"/>
+          </a:xfrm>
+          <a:prstGeom prst="rect">
+            <a:avLst/>
+          </a:prstGeom>
+          <a:noFill/>
+          <a:ln/>
+        </p:spPr>
+        <p:txBody>
+          <a:bodyPr wrap="square" lIns="0" tIns="0" rIns="0" bIns="0" rtlCol="0" anchor="ctr"/>
+          <a:lstStyle/>
+          <a:p>
             <a:pPr indent="0" marL="0">
               <a:buNone/>
             </a:pPr>
@@ -5487,7 +5566,7 @@
                 <a:ea typeface="Calibri" pitchFamily="34" charset="-122"/>
                 <a:cs typeface="Calibri" pitchFamily="34" charset="-120"/>
               </a:rPr>
-              <a:t>, or put the QR code up on the board</a:t>
+              <a:t>Students open it on their device and create an account</a:t>
             </a:r>
             <a:endParaRPr lang="en-US" sz="2000" dirty="0"/>
           </a:p>
@@ -5495,38 +5574,38 @@
       </p:sp>
       <p:sp>
         <p:nvSpPr>
-          <p:cNvPr id="14" name="Shape 11"/>
-          <p:cNvSpPr/>
-          <p:nvPr/>
-        </p:nvSpPr>
-        <p:spPr>
-          <a:xfrm>
-            <a:off x="685800" y="2944368"/>
+          <p:cNvPr id="17" name="Shape 14"/>
+          <p:cNvSpPr/>
+          <p:nvPr/>
+        </p:nvSpPr>
+        <p:spPr>
+          <a:xfrm>
+            <a:off x="6324448" y="2944368"/>
             <a:ext cx="548640" cy="548640"/>
           </a:xfrm>
           <a:prstGeom prst="ellipse">
             <a:avLst/>
           </a:prstGeom>
           <a:solidFill>
-            <a:srgbClr val="FC4540"/>
+            <a:srgbClr val="FF9755"/>
           </a:solidFill>
           <a:ln w="12700">
             <a:solidFill>
-              <a:srgbClr val="FC4540"/>
-            </a:solidFill>
-            <a:prstDash val="solid"/>
-          </a:ln>
-        </p:spPr>
-      </p:sp>
-      <p:sp>
-        <p:nvSpPr>
-          <p:cNvPr id="15" name="Text 12"/>
-          <p:cNvSpPr/>
-          <p:nvPr/>
-        </p:nvSpPr>
-        <p:spPr>
-          <a:xfrm>
-            <a:off x="685800" y="2944368"/>
+              <a:srgbClr val="FF9755"/>
+            </a:solidFill>
+            <a:prstDash val="solid"/>
+          </a:ln>
+        </p:spPr>
+      </p:sp>
+      <p:sp>
+        <p:nvSpPr>
+          <p:cNvPr id="18" name="Text 15"/>
+          <p:cNvSpPr/>
+          <p:nvPr/>
+        </p:nvSpPr>
+        <p:spPr>
+          <a:xfrm>
+            <a:off x="6324448" y="2944368"/>
             <a:ext cx="548640" cy="548640"/>
           </a:xfrm>
           <a:prstGeom prst="rect">
@@ -5551,7 +5630,7 @@
                 <a:ea typeface="Georgia" pitchFamily="34" charset="-122"/>
                 <a:cs typeface="Georgia" pitchFamily="34" charset="-120"/>
               </a:rPr>
-              <a:t>3</a:t>
+              <a:t>4</a:t>
             </a:r>
             <a:endParaRPr lang="en-US" sz="2200" dirty="0"/>
           </a:p>
@@ -5559,13 +5638,13 @@
       </p:sp>
       <p:sp>
         <p:nvSpPr>
-          <p:cNvPr id="16" name="Text 13"/>
-          <p:cNvSpPr/>
-          <p:nvPr/>
-        </p:nvSpPr>
-        <p:spPr>
-          <a:xfrm>
-            <a:off x="1417320" y="2834640"/>
+          <p:cNvPr id="19" name="Text 16"/>
+          <p:cNvSpPr/>
+          <p:nvPr/>
+        </p:nvSpPr>
+        <p:spPr>
+          <a:xfrm>
+            <a:off x="7055968" y="2834640"/>
             <a:ext cx="4449928" cy="822960"/>
           </a:xfrm>
           <a:prstGeom prst="rect">
@@ -5590,114 +5669,8 @@
                 <a:ea typeface="Calibri" pitchFamily="34" charset="-122"/>
                 <a:cs typeface="Calibri" pitchFamily="34" charset="-120"/>
               </a:rPr>
-              <a:t>Students open it on their device and create an account</a:t>
-            </a:r>
-            <a:endParaRPr lang="en-US" sz="2000" dirty="0"/>
-          </a:p>
-        </p:txBody>
-      </p:sp>
-      <p:sp>
-        <p:nvSpPr>
-          <p:cNvPr id="17" name="Shape 14"/>
-          <p:cNvSpPr/>
-          <p:nvPr/>
-        </p:nvSpPr>
-        <p:spPr>
-          <a:xfrm>
-            <a:off x="6324448" y="2944368"/>
-            <a:ext cx="548640" cy="548640"/>
-          </a:xfrm>
-          <a:prstGeom prst="ellipse">
-            <a:avLst/>
-          </a:prstGeom>
-          <a:solidFill>
-            <a:srgbClr val="FF9755"/>
-          </a:solidFill>
-          <a:ln w="12700">
-            <a:solidFill>
-              <a:srgbClr val="FF9755"/>
-            </a:solidFill>
-            <a:prstDash val="solid"/>
-          </a:ln>
-        </p:spPr>
-      </p:sp>
-      <p:sp>
-        <p:nvSpPr>
-          <p:cNvPr id="18" name="Text 15"/>
-          <p:cNvSpPr/>
-          <p:nvPr/>
-        </p:nvSpPr>
-        <p:spPr>
-          <a:xfrm>
-            <a:off x="6324448" y="2944368"/>
-            <a:ext cx="548640" cy="548640"/>
-          </a:xfrm>
-          <a:prstGeom prst="rect">
-            <a:avLst/>
-          </a:prstGeom>
-          <a:noFill/>
-          <a:ln/>
-        </p:spPr>
-        <p:txBody>
-          <a:bodyPr wrap="square" lIns="0" tIns="0" rIns="0" bIns="0" rtlCol="0" anchor="ctr"/>
-          <a:lstStyle/>
-          <a:p>
-            <a:pPr algn="ctr" indent="0" marL="0">
-              <a:buNone/>
-            </a:pPr>
-            <a:r>
-              <a:rPr lang="en-US" sz="2200" b="1" dirty="0">
-                <a:solidFill>
-                  <a:srgbClr val="FFFEFA"/>
-                </a:solidFill>
-                <a:latin typeface="Georgia" pitchFamily="34" charset="0"/>
-                <a:ea typeface="Georgia" pitchFamily="34" charset="-122"/>
-                <a:cs typeface="Georgia" pitchFamily="34" charset="-120"/>
-              </a:rPr>
-              <a:t>4</a:t>
-            </a:r>
-            <a:endParaRPr lang="en-US" sz="2200" dirty="0"/>
-          </a:p>
-        </p:txBody>
-      </p:sp>
-      <p:sp>
-        <p:nvSpPr>
-          <p:cNvPr id="19" name="Text 16"/>
-          <p:cNvSpPr/>
-          <p:nvPr/>
-        </p:nvSpPr>
-        <p:spPr>
-          <a:xfrm>
-            <a:off x="7055968" y="2834640"/>
-            <a:ext cx="4449928" cy="822960"/>
-          </a:xfrm>
-          <a:prstGeom prst="rect">
-            <a:avLst/>
-          </a:prstGeom>
-          <a:noFill/>
-          <a:ln/>
-        </p:spPr>
-        <p:txBody>
-          <a:bodyPr wrap="square" lIns="0" tIns="0" rIns="0" bIns="0" rtlCol="0" anchor="ctr"/>
-          <a:lstStyle/>
-          <a:p>
-            <a:pPr indent="0" marL="0">
-              <a:buNone/>
-            </a:pPr>
-            <a:r>
-              <a:rPr lang="en-US" sz="2000" dirty="0">
-                <a:solidFill>
-                  <a:srgbClr val="3C3828"/>
-                </a:solidFill>
-                <a:latin typeface="Calibri" pitchFamily="34" charset="0"/>
-                <a:ea typeface="Calibri" pitchFamily="34" charset="-122"/>
-                <a:cs typeface="Calibri" pitchFamily="34" charset="-120"/>
-              </a:rPr>
               <a:t>No email needed: just a </a:t>
             </a:r>
-            <a:pPr indent="0" marL="0">
-              <a:buNone/>
-            </a:pPr>
             <a:r>
               <a:rPr lang="en-US" sz="2000" dirty="0">
                 <a:solidFill>
@@ -5712,9 +5685,6 @@
               </a:rPr>
               <a:t>handle</a:t>
             </a:r>
-            <a:pPr indent="0" marL="0">
-              <a:buNone/>
-            </a:pPr>
             <a:r>
               <a:rPr lang="en-US" sz="2000" dirty="0">
                 <a:solidFill>
@@ -5766,7 +5736,7 @@
       </p:sp>
       <p:pic>
         <p:nvPicPr>
-          <p:cNvPr id="21" name="Image 1" descr="/home/user/yawp/services/web-app/scripts/thesis-essay-decks/assets/yawp-join-link-card.png">    </p:cNvPr>
+          <p:cNvPr id="21" name="Image 1" descr="The class's join link and QR code on the Students tab.">    </p:cNvPr>
           <p:cNvPicPr>
             <a:picLocks noChangeAspect="1"/>
           </p:cNvPicPr>
@@ -5975,7 +5945,7 @@
       </p:sp>
       <p:pic>
         <p:nvPicPr>
-          <p:cNvPr id="5" name="Image 0" descr="/home/user/yawp/services/web-app/scripts/thesis-essay-decks/assets/yawp-join-page.png">    </p:cNvPr>
+          <p:cNvPr id="5" name="Image 0" descr="The YAWP! &quot;Create your student account&quot; page.">    </p:cNvPr>
           <p:cNvPicPr>
             <a:picLocks noChangeAspect="1"/>
           </p:cNvPicPr>
@@ -6121,9 +6091,6 @@
               </a:rPr>
               <a:t>Your </a:t>
             </a:r>
-            <a:pPr indent="0" marL="0">
-              <a:buNone/>
-            </a:pPr>
             <a:r>
               <a:rPr lang="en-US" sz="2400" dirty="0">
                 <a:solidFill>
@@ -6138,6 +6105,67 @@
               </a:rPr>
               <a:t>display name</a:t>
             </a:r>
+            <a:r>
+              <a:rPr lang="en-US" sz="2400" dirty="0">
+                <a:solidFill>
+                  <a:srgbClr val="3C3828"/>
+                </a:solidFill>
+                <a:latin typeface="Calibri" pitchFamily="34" charset="0"/>
+                <a:ea typeface="Calibri" pitchFamily="34" charset="-122"/>
+                <a:cs typeface="Calibri" pitchFamily="34" charset="-120"/>
+              </a:rPr>
+              <a:t>: what your teacher sees</a:t>
+            </a:r>
+            <a:endParaRPr lang="en-US" sz="2400" dirty="0"/>
+          </a:p>
+        </p:txBody>
+      </p:sp>
+      <p:sp>
+        <p:nvSpPr>
+          <p:cNvPr id="10" name="Shape 7"/>
+          <p:cNvSpPr/>
+          <p:nvPr/>
+        </p:nvSpPr>
+        <p:spPr>
+          <a:xfrm>
+            <a:off x="3021439" y="4334256"/>
+            <a:ext cx="292608" cy="292608"/>
+          </a:xfrm>
+          <a:prstGeom prst="ellipse">
+            <a:avLst/>
+          </a:prstGeom>
+          <a:solidFill>
+            <a:srgbClr val="FF9755"/>
+          </a:solidFill>
+          <a:ln w="12700">
+            <a:solidFill>
+              <a:srgbClr val="FF9755"/>
+            </a:solidFill>
+            <a:prstDash val="solid"/>
+          </a:ln>
+        </p:spPr>
+      </p:sp>
+      <p:sp>
+        <p:nvSpPr>
+          <p:cNvPr id="11" name="Text 8"/>
+          <p:cNvSpPr/>
+          <p:nvPr/>
+        </p:nvSpPr>
+        <p:spPr>
+          <a:xfrm>
+            <a:off x="3496927" y="4023360"/>
+            <a:ext cx="8008968" cy="914400"/>
+          </a:xfrm>
+          <a:prstGeom prst="rect">
+            <a:avLst/>
+          </a:prstGeom>
+          <a:noFill/>
+          <a:ln/>
+        </p:spPr>
+        <p:txBody>
+          <a:bodyPr wrap="square" lIns="0" tIns="0" rIns="0" bIns="0" rtlCol="0" anchor="ctr"/>
+          <a:lstStyle/>
+          <a:p>
             <a:pPr indent="0" marL="0">
               <a:buNone/>
             </a:pPr>
@@ -6150,75 +6178,8 @@
                 <a:ea typeface="Calibri" pitchFamily="34" charset="-122"/>
                 <a:cs typeface="Calibri" pitchFamily="34" charset="-120"/>
               </a:rPr>
-              <a:t>: what your teacher sees</a:t>
-            </a:r>
-            <a:endParaRPr lang="en-US" sz="2400" dirty="0"/>
-          </a:p>
-        </p:txBody>
-      </p:sp>
-      <p:sp>
-        <p:nvSpPr>
-          <p:cNvPr id="10" name="Shape 7"/>
-          <p:cNvSpPr/>
-          <p:nvPr/>
-        </p:nvSpPr>
-        <p:spPr>
-          <a:xfrm>
-            <a:off x="3021439" y="4334256"/>
-            <a:ext cx="292608" cy="292608"/>
-          </a:xfrm>
-          <a:prstGeom prst="ellipse">
-            <a:avLst/>
-          </a:prstGeom>
-          <a:solidFill>
-            <a:srgbClr val="FF9755"/>
-          </a:solidFill>
-          <a:ln w="12700">
-            <a:solidFill>
-              <a:srgbClr val="FF9755"/>
-            </a:solidFill>
-            <a:prstDash val="solid"/>
-          </a:ln>
-        </p:spPr>
-      </p:sp>
-      <p:sp>
-        <p:nvSpPr>
-          <p:cNvPr id="11" name="Text 8"/>
-          <p:cNvSpPr/>
-          <p:nvPr/>
-        </p:nvSpPr>
-        <p:spPr>
-          <a:xfrm>
-            <a:off x="3496927" y="4023360"/>
-            <a:ext cx="8008968" cy="914400"/>
-          </a:xfrm>
-          <a:prstGeom prst="rect">
-            <a:avLst/>
-          </a:prstGeom>
-          <a:noFill/>
-          <a:ln/>
-        </p:spPr>
-        <p:txBody>
-          <a:bodyPr wrap="square" lIns="0" tIns="0" rIns="0" bIns="0" rtlCol="0" anchor="ctr"/>
-          <a:lstStyle/>
-          <a:p>
-            <a:pPr indent="0" marL="0">
-              <a:buNone/>
-            </a:pPr>
-            <a:r>
-              <a:rPr lang="en-US" sz="2400" dirty="0">
-                <a:solidFill>
-                  <a:srgbClr val="3C3828"/>
-                </a:solidFill>
-                <a:latin typeface="Calibri" pitchFamily="34" charset="0"/>
-                <a:ea typeface="Calibri" pitchFamily="34" charset="-122"/>
-                <a:cs typeface="Calibri" pitchFamily="34" charset="-120"/>
-              </a:rPr>
               <a:t>A </a:t>
             </a:r>
-            <a:pPr indent="0" marL="0">
-              <a:buNone/>
-            </a:pPr>
             <a:r>
               <a:rPr lang="en-US" sz="2400" dirty="0">
                 <a:solidFill>
@@ -6233,6 +6194,67 @@
               </a:rPr>
               <a:t>handle</a:t>
             </a:r>
+            <a:r>
+              <a:rPr lang="en-US" sz="2400" dirty="0">
+                <a:solidFill>
+                  <a:srgbClr val="3C3828"/>
+                </a:solidFill>
+                <a:latin typeface="Calibri" pitchFamily="34" charset="0"/>
+                <a:ea typeface="Calibri" pitchFamily="34" charset="-122"/>
+                <a:cs typeface="Calibri" pitchFamily="34" charset="-120"/>
+              </a:rPr>
+              <a:t>: how you log in</a:t>
+            </a:r>
+            <a:endParaRPr lang="en-US" sz="2400" dirty="0"/>
+          </a:p>
+        </p:txBody>
+      </p:sp>
+      <p:sp>
+        <p:nvSpPr>
+          <p:cNvPr id="12" name="Shape 9"/>
+          <p:cNvSpPr/>
+          <p:nvPr/>
+        </p:nvSpPr>
+        <p:spPr>
+          <a:xfrm>
+            <a:off x="3021439" y="5248656"/>
+            <a:ext cx="292608" cy="292608"/>
+          </a:xfrm>
+          <a:prstGeom prst="ellipse">
+            <a:avLst/>
+          </a:prstGeom>
+          <a:solidFill>
+            <a:srgbClr val="FC4067"/>
+          </a:solidFill>
+          <a:ln w="12700">
+            <a:solidFill>
+              <a:srgbClr val="FC4067"/>
+            </a:solidFill>
+            <a:prstDash val="solid"/>
+          </a:ln>
+        </p:spPr>
+      </p:sp>
+      <p:sp>
+        <p:nvSpPr>
+          <p:cNvPr id="13" name="Text 10"/>
+          <p:cNvSpPr/>
+          <p:nvPr/>
+        </p:nvSpPr>
+        <p:spPr>
+          <a:xfrm>
+            <a:off x="3496927" y="4937760"/>
+            <a:ext cx="8008968" cy="914400"/>
+          </a:xfrm>
+          <a:prstGeom prst="rect">
+            <a:avLst/>
+          </a:prstGeom>
+          <a:noFill/>
+          <a:ln/>
+        </p:spPr>
+        <p:txBody>
+          <a:bodyPr wrap="square" lIns="0" tIns="0" rIns="0" bIns="0" rtlCol="0" anchor="ctr"/>
+          <a:lstStyle/>
+          <a:p>
             <a:pPr indent="0" marL="0">
               <a:buNone/>
             </a:pPr>
@@ -6245,75 +6267,8 @@
                 <a:ea typeface="Calibri" pitchFamily="34" charset="-122"/>
                 <a:cs typeface="Calibri" pitchFamily="34" charset="-120"/>
               </a:rPr>
-              <a:t>: how you log in</a:t>
-            </a:r>
-            <a:endParaRPr lang="en-US" sz="2400" dirty="0"/>
-          </a:p>
-        </p:txBody>
-      </p:sp>
-      <p:sp>
-        <p:nvSpPr>
-          <p:cNvPr id="12" name="Shape 9"/>
-          <p:cNvSpPr/>
-          <p:nvPr/>
-        </p:nvSpPr>
-        <p:spPr>
-          <a:xfrm>
-            <a:off x="3021439" y="5248656"/>
-            <a:ext cx="292608" cy="292608"/>
-          </a:xfrm>
-          <a:prstGeom prst="ellipse">
-            <a:avLst/>
-          </a:prstGeom>
-          <a:solidFill>
-            <a:srgbClr val="FC4067"/>
-          </a:solidFill>
-          <a:ln w="12700">
-            <a:solidFill>
-              <a:srgbClr val="FC4067"/>
-            </a:solidFill>
-            <a:prstDash val="solid"/>
-          </a:ln>
-        </p:spPr>
-      </p:sp>
-      <p:sp>
-        <p:nvSpPr>
-          <p:cNvPr id="13" name="Text 10"/>
-          <p:cNvSpPr/>
-          <p:nvPr/>
-        </p:nvSpPr>
-        <p:spPr>
-          <a:xfrm>
-            <a:off x="3496927" y="4937760"/>
-            <a:ext cx="8008968" cy="914400"/>
-          </a:xfrm>
-          <a:prstGeom prst="rect">
-            <a:avLst/>
-          </a:prstGeom>
-          <a:noFill/>
-          <a:ln/>
-        </p:spPr>
-        <p:txBody>
-          <a:bodyPr wrap="square" lIns="0" tIns="0" rIns="0" bIns="0" rtlCol="0" anchor="ctr"/>
-          <a:lstStyle/>
-          <a:p>
-            <a:pPr indent="0" marL="0">
-              <a:buNone/>
-            </a:pPr>
-            <a:r>
-              <a:rPr lang="en-US" sz="2400" dirty="0">
-                <a:solidFill>
-                  <a:srgbClr val="3C3828"/>
-                </a:solidFill>
-                <a:latin typeface="Calibri" pitchFamily="34" charset="0"/>
-                <a:ea typeface="Calibri" pitchFamily="34" charset="-122"/>
-                <a:cs typeface="Calibri" pitchFamily="34" charset="-120"/>
-              </a:rPr>
               <a:t>A password, twice, then </a:t>
             </a:r>
-            <a:pPr indent="0" marL="0">
-              <a:buNone/>
-            </a:pPr>
             <a:r>
               <a:rPr lang="en-US" sz="2400" dirty="0">
                 <a:solidFill>
@@ -6519,7 +6474,7 @@
       </p:sp>
       <p:pic>
         <p:nvPicPr>
-          <p:cNvPr id="5" name="Image 0" descr="/home/user/yawp/services/web-app/scripts/thesis-essay-decks/assets/yawp-student-dashboard.png">    </p:cNvPr>
+          <p:cNvPr id="5" name="Image 0" descr="The YAWP! student dashboard after joining.">    </p:cNvPr>
           <p:cNvPicPr>
             <a:picLocks noChangeAspect="1"/>
           </p:cNvPicPr>
@@ -6793,9 +6748,6 @@
               </a:rPr>
               <a:t>The </a:t>
             </a:r>
-            <a:pPr indent="0" marL="0">
-              <a:buNone/>
-            </a:pPr>
             <a:r>
               <a:rPr lang="en-US" sz="2000" dirty="0">
                 <a:solidFill>
@@ -6810,9 +6762,6 @@
               </a:rPr>
               <a:t>Tutor</a:t>
             </a:r>
-            <a:pPr indent="0" marL="0">
-              <a:buNone/>
-            </a:pPr>
             <a:r>
               <a:rPr lang="en-US" sz="2000" dirty="0">
                 <a:solidFill>
@@ -7006,7 +6955,7 @@
       </p:sp>
       <p:pic>
         <p:nvPicPr>
-          <p:cNvPr id="5" name="Image 0" descr="/home/user/yawp/services/web-app/scripts/thesis-essay-decks/assets/icons/pencil.png">    </p:cNvPr>
+          <p:cNvPr id="5" name="Image 0" descr="pencil icon">    </p:cNvPr>
           <p:cNvPicPr>
             <a:picLocks noChangeAspect="1"/>
           </p:cNvPicPr>
@@ -7113,9 +7062,6 @@
               </a:rPr>
               <a:t>The rules: the </a:t>
             </a:r>
-            <a:pPr indent="0" marL="0">
-              <a:buNone/>
-            </a:pPr>
             <a:r>
               <a:rPr lang="en-US" sz="2200" dirty="0">
                 <a:solidFill>
@@ -7130,9 +7076,6 @@
               </a:rPr>
               <a:t>truths have to be true,</a:t>
             </a:r>
-            <a:pPr indent="0" marL="0">
-              <a:buNone/>
-            </a:pPr>
             <a:r>
               <a:rPr lang="en-US" sz="2200" dirty="0">
                 <a:solidFill>
@@ -7144,9 +7087,6 @@
               </a:rPr>
               <a:t> and the </a:t>
             </a:r>
-            <a:pPr indent="0" marL="0">
-              <a:buNone/>
-            </a:pPr>
             <a:r>
               <a:rPr lang="en-US" sz="2200" dirty="0">
                 <a:solidFill>
@@ -7161,9 +7101,6 @@
               </a:rPr>
               <a:t>lie has to be believable.</a:t>
             </a:r>
-            <a:pPr indent="0" marL="0">
-              <a:buNone/>
-            </a:pPr>
             <a:r>
               <a:rPr lang="en-US" sz="2200" dirty="0">
                 <a:solidFill>
@@ -7852,7 +7789,7 @@
       </p:sp>
       <p:pic>
         <p:nvPicPr>
-          <p:cNvPr id="5" name="Image 0" descr="/home/user/yawp/services/web-app/scripts/thesis-essay-decks/assets/brian-twins.jpg">    </p:cNvPr>
+          <p:cNvPr id="5" name="Image 0" descr="A childhood photo of Brian.">    </p:cNvPr>
           <p:cNvPicPr>
             <a:picLocks noChangeAspect="1"/>
           </p:cNvPicPr>
@@ -8106,7 +8043,7 @@
       </p:sp>
       <p:pic>
         <p:nvPicPr>
-          <p:cNvPr id="5" name="Image 0" descr="/home/user/yawp/services/web-app/scripts/thesis-essay-decks/assets/brian-1990s.jpg">    </p:cNvPr>
+          <p:cNvPr id="5" name="Image 0" descr="A photo of Brian from the 1990s.">    </p:cNvPr>
           <p:cNvPicPr>
             <a:picLocks noChangeAspect="1"/>
           </p:cNvPicPr>
@@ -8351,7 +8288,7 @@
       </p:sp>
       <p:pic>
         <p:nvPicPr>
-          <p:cNvPr id="5" name="Image 0" descr="/home/user/yawp/services/web-app/scripts/thesis-essay-decks/assets/icons/pencil.png">    </p:cNvPr>
+          <p:cNvPr id="5" name="Image 0" descr="pencil icon">    </p:cNvPr>
           <p:cNvPicPr>
             <a:picLocks noChangeAspect="1"/>
           </p:cNvPicPr>
@@ -8461,12 +8398,6 @@
               </a:rPr>
               <a:t>Write your own. Remember, the truths have to be true, and </a:t>
             </a:r>
-            <a:pPr indent="0" marL="0">
-              <a:lnSpc>
-                <a:spcPct val="115000"/>
-              </a:lnSpc>
-              <a:buNone/>
-            </a:pPr>
             <a:r>
               <a:rPr lang="en-US" sz="4000" dirty="0">
                 <a:solidFill>
@@ -8744,7 +8675,7 @@
       </p:sp>
       <p:pic>
         <p:nvPicPr>
-          <p:cNvPr id="7" name="Image 0" descr="/home/user/yawp/services/web-app/scripts/thesis-essay-decks/assets/icons/lightbulb.png">    </p:cNvPr>
+          <p:cNvPr id="7" name="Image 0" descr="lightbulb icon">    </p:cNvPr>
           <p:cNvPicPr>
             <a:picLocks noChangeAspect="1"/>
           </p:cNvPicPr>
@@ -8793,7 +8724,7 @@
       </p:sp>
       <p:pic>
         <p:nvPicPr>
-          <p:cNvPr id="9" name="Image 1" descr="/home/user/yawp/services/web-app/scripts/thesis-essay-decks/assets/icons/puzzle.png">    </p:cNvPr>
+          <p:cNvPr id="9" name="Image 1" descr="puzzle icon">    </p:cNvPr>
           <p:cNvPicPr>
             <a:picLocks noChangeAspect="1"/>
           </p:cNvPicPr>
@@ -8842,7 +8773,7 @@
       </p:sp>
       <p:pic>
         <p:nvPicPr>
-          <p:cNvPr id="11" name="Image 2" descr="/home/user/yawp/services/web-app/scripts/thesis-essay-decks/assets/icons/thumbs.png">    </p:cNvPr>
+          <p:cNvPr id="11" name="Image 2" descr="thumbs icon">    </p:cNvPr>
           <p:cNvPicPr>
             <a:picLocks noChangeAspect="1"/>
           </p:cNvPicPr>
@@ -9547,7 +9478,7 @@
       </p:sp>
       <p:pic>
         <p:nvPicPr>
-          <p:cNvPr id="5" name="Image 0" descr="/home/user/yawp/services/web-app/scripts/thesis-essay-decks/assets/icons/pencil.png">    </p:cNvPr>
+          <p:cNvPr id="5" name="Image 0" descr="pencil icon">    </p:cNvPr>
           <p:cNvPicPr>
             <a:picLocks noChangeAspect="1"/>
           </p:cNvPicPr>
@@ -9777,9 +9708,6 @@
               </a:rPr>
               <a:t>Because we have </a:t>
             </a:r>
-            <a:pPr indent="0" marL="0">
-              <a:buNone/>
-            </a:pPr>
             <a:r>
               <a:rPr lang="en-US" sz="2100" dirty="0">
                 <a:solidFill>
@@ -9794,9 +9722,6 @@
               </a:rPr>
               <a:t>things to say!</a:t>
             </a:r>
-            <a:pPr indent="0" marL="0">
-              <a:buNone/>
-            </a:pPr>
             <a:r>
               <a:rPr lang="en-US" sz="2100" dirty="0">
                 <a:solidFill>
@@ -9970,9 +9895,6 @@
               </a:rPr>
               <a:t>Because writing is one of the most effective ways of </a:t>
             </a:r>
-            <a:pPr indent="0" marL="0">
-              <a:buNone/>
-            </a:pPr>
             <a:r>
               <a:rPr lang="en-US" sz="2100" dirty="0">
                 <a:solidFill>
@@ -9987,9 +9909,6 @@
               </a:rPr>
               <a:t>expressing ourselves.</a:t>
             </a:r>
-            <a:pPr indent="0" marL="0">
-              <a:buNone/>
-            </a:pPr>
             <a:r>
               <a:rPr lang="en-US" sz="2100" dirty="0">
                 <a:solidFill>
@@ -10163,9 +10082,6 @@
               </a:rPr>
               <a:t>Because </a:t>
             </a:r>
-            <a:pPr indent="0" marL="0">
-              <a:buNone/>
-            </a:pPr>
             <a:r>
               <a:rPr lang="en-US" sz="2100" dirty="0">
                 <a:solidFill>
@@ -10443,7 +10359,7 @@
       </p:sp>
       <p:pic>
         <p:nvPicPr>
-          <p:cNvPr id="7" name="Image 0" descr="/home/user/yawp/services/web-app/scripts/thesis-essay-decks/assets/icons/lightbulb.png">    </p:cNvPr>
+          <p:cNvPr id="7" name="Image 0" descr="lightbulb icon">    </p:cNvPr>
           <p:cNvPicPr>
             <a:picLocks noChangeAspect="1"/>
           </p:cNvPicPr>
@@ -10492,7 +10408,7 @@
       </p:sp>
       <p:pic>
         <p:nvPicPr>
-          <p:cNvPr id="9" name="Image 1" descr="/home/user/yawp/services/web-app/scripts/thesis-essay-decks/assets/icons/puzzle.png">    </p:cNvPr>
+          <p:cNvPr id="9" name="Image 1" descr="puzzle icon">    </p:cNvPr>
           <p:cNvPicPr>
             <a:picLocks noChangeAspect="1"/>
           </p:cNvPicPr>
@@ -10541,7 +10457,7 @@
       </p:sp>
       <p:pic>
         <p:nvPicPr>
-          <p:cNvPr id="11" name="Image 2" descr="/home/user/yawp/services/web-app/scripts/thesis-essay-decks/assets/icons/thumbs.png">    </p:cNvPr>
+          <p:cNvPr id="11" name="Image 2" descr="thumbs icon">    </p:cNvPr>
           <p:cNvPicPr>
             <a:picLocks noChangeAspect="1"/>
           </p:cNvPicPr>

--- a/services/web-app/resources/thesis-essay-decks/lesson-1-day-1.pptx
+++ b/services/web-app/resources/thesis-essay-decks/lesson-1-day-1.pptx
@@ -20,9 +20,10 @@
     <p:sldId id="268" r:id="rId14"/>
     <p:sldId id="269" r:id="rId15"/>
     <p:sldId id="270" r:id="rId16"/>
+    <p:sldId id="271" r:id="rId17"/>
   </p:sldIdLst>
   <p:notesMasterIdLst>
-    <p:notesMasterId r:id="rId17"/>
+    <p:notesMasterId r:id="rId18"/>
   </p:notesMasterIdLst>
   <p:sldSz cx="12191695" cy="6858000"/>
   <p:notesSz cx="6858000" cy="12191695"/>
@@ -1086,6 +1087,94 @@
 </p:notes>
 </file>
 
+<file path=ppt/notesSlides/notesSlide16.xml><?xml version="1.0" encoding="utf-8"?>
+<p:notes xmlns:a="http://schemas.openxmlformats.org/drawingml/2006/main" xmlns:r="http://schemas.openxmlformats.org/officeDocument/2006/relationships" xmlns:p="http://schemas.openxmlformats.org/presentationml/2006/main">
+  <p:cSld>
+    <p:spTree>
+      <p:nvGrpSpPr>
+        <p:cNvPr id="1" name=""/>
+        <p:cNvGrpSpPr/>
+        <p:nvPr/>
+      </p:nvGrpSpPr>
+      <p:grpSpPr>
+        <a:xfrm>
+          <a:off x="0" y="0"/>
+          <a:ext cx="0" cy="0"/>
+          <a:chOff x="0" y="0"/>
+          <a:chExt cx="0" cy="0"/>
+        </a:xfrm>
+      </p:grpSpPr>
+      <p:sp>
+        <p:nvSpPr>
+          <p:cNvPr id="2" name="Slide Image Placeholder 1"/>
+          <p:cNvSpPr>
+            <a:spLocks noGrp="1" noRot="1" noChangeAspect="1"/>
+          </p:cNvSpPr>
+          <p:nvPr>
+            <p:ph type="sldImg"/>
+          </p:nvPr>
+        </p:nvSpPr>
+        <p:spPr/>
+      </p:sp>
+      <p:sp>
+        <p:nvSpPr>
+          <p:cNvPr id="3" name="Notes Placeholder 2"/>
+          <p:cNvSpPr>
+            <a:spLocks noGrp="1"/>
+          </p:cNvSpPr>
+          <p:nvPr>
+            <p:ph type="body" idx="1"/>
+          </p:nvPr>
+        </p:nvSpPr>
+        <p:spPr/>
+        <p:txBody>
+          <a:bodyPr/>
+          <a:lstStyle/>
+          <a:p>
+            <a:r>
+              <a:rPr lang="en-US" dirty="0"/>
+              <a:t>Before students leave, make sure everyone has joined your class and started the assignment. Collect any forgotten handles now; it saves time next class.</a:t>
+            </a:r>
+            <a:endParaRPr lang="en-US" dirty="0"/>
+          </a:p>
+        </p:txBody>
+      </p:sp>
+      <p:sp>
+        <p:nvSpPr>
+          <p:cNvPr id="4" name="Slide Number Placeholder 3"/>
+          <p:cNvSpPr>
+            <a:spLocks noGrp="1"/>
+          </p:cNvSpPr>
+          <p:nvPr>
+            <p:ph type="sldNum" sz="quarter" idx="10"/>
+          </p:nvPr>
+        </p:nvSpPr>
+        <p:spPr/>
+        <p:txBody>
+          <a:bodyPr/>
+          <a:lstStyle/>
+          <a:p>
+            <a:fld id="{F7021451-1387-4CA6-816F-3879F97B5CBC}" type="slidenum">
+              <a:rPr lang="en-US"/>
+              <a:t>16</a:t>
+            </a:fld>
+            <a:endParaRPr lang="en-US"/>
+          </a:p>
+        </p:txBody>
+      </p:sp>
+    </p:spTree>
+    <p:extLst>
+      <p:ext uri="{BB962C8B-B14F-4D97-AF65-F5344CB8AC3E}">
+        <p14:creationId xmlns:p14="http://schemas.microsoft.com/office/powerpoint/2010/main" val="1024086991"/>
+      </p:ext>
+    </p:extLst>
+  </p:cSld>
+  <p:clrMapOvr>
+    <a:masterClrMapping/>
+  </p:clrMapOvr>
+</p:notes>
+</file>
+
 <file path=ppt/notesSlides/notesSlide2.xml><?xml version="1.0" encoding="utf-8"?>
 <p:notes xmlns:a="http://schemas.openxmlformats.org/drawingml/2006/main" xmlns:r="http://schemas.openxmlformats.org/officeDocument/2006/relationships" xmlns:p="http://schemas.openxmlformats.org/presentationml/2006/main">
   <p:cSld>
@@ -1748,7 +1837,7 @@
           <a:p>
             <a:r>
               <a:rPr lang="en-US" dirty="0"/>
-              <a:t>Use "Bored in the USA" from the resources, or your own sample, as long as it follows our form (intro ending in a thesis, body paragraphs, conclusion). Everyone has a copy. Before reading, ask everyone to underline or highlight anything interesting, at least one thing per paragraph. Volunteers read aloud, a paragraph each. Don’t overanalyze.</a:t>
+              <a:t>Use "Bored in the USA" (the Sample essay handout, next to this deck in the Modules), or your own sample, as long as it follows our form (intro ending in a thesis, body paragraphs, conclusion). Everyone has a copy. Before reading, ask everyone to underline or highlight anything interesting, at least one thing per paragraph. Volunteers read aloud, a paragraph each. Don’t overanalyze.</a:t>
             </a:r>
             <a:endParaRPr lang="en-US" dirty="0"/>
           </a:p>
@@ -3192,12 +3281,12 @@
         </p:nvSpPr>
         <p:spPr>
           <a:xfrm>
-            <a:off x="685800" y="1965960"/>
-            <a:ext cx="3393338" cy="3749040"/>
+            <a:off x="685800" y="2652268"/>
+            <a:ext cx="3393338" cy="2742184"/>
           </a:xfrm>
           <a:prstGeom prst="roundRect">
             <a:avLst>
-              <a:gd name="adj" fmla="val 3773"/>
+              <a:gd name="adj" fmla="val 4668"/>
             </a:avLst>
           </a:prstGeom>
           <a:solidFill>
@@ -3226,7 +3315,7 @@
         </p:nvSpPr>
         <p:spPr>
           <a:xfrm>
-            <a:off x="813816" y="1965960"/>
+            <a:off x="813816" y="2652268"/>
             <a:ext cx="3137306" cy="91440"/>
           </a:xfrm>
           <a:prstGeom prst="rect">
@@ -3251,7 +3340,7 @@
         </p:nvSpPr>
         <p:spPr>
           <a:xfrm>
-            <a:off x="1005840" y="2331720"/>
+            <a:off x="1005840" y="3018028"/>
             <a:ext cx="731520" cy="731520"/>
           </a:xfrm>
           <a:prstGeom prst="ellipse">
@@ -3276,7 +3365,7 @@
         </p:nvSpPr>
         <p:spPr>
           <a:xfrm>
-            <a:off x="1005840" y="2331720"/>
+            <a:off x="1005840" y="3018028"/>
             <a:ext cx="731520" cy="731520"/>
           </a:xfrm>
           <a:prstGeom prst="rect">
@@ -3315,8 +3404,8 @@
         </p:nvSpPr>
         <p:spPr>
           <a:xfrm>
-            <a:off x="1005840" y="3246120"/>
-            <a:ext cx="2753258" cy="2286000"/>
+            <a:off x="1005840" y="3932428"/>
+            <a:ext cx="2753258" cy="1279144"/>
           </a:xfrm>
           <a:prstGeom prst="rect">
             <a:avLst/>
@@ -3332,7 +3421,7 @@
               <a:buNone/>
             </a:pPr>
             <a:r>
-              <a:rPr lang="en-US" sz="2600" dirty="0">
+              <a:rPr lang="en-US" sz="2800" dirty="0">
                 <a:solidFill>
                   <a:srgbClr val="3C3828"/>
                 </a:solidFill>
@@ -3342,7 +3431,7 @@
               </a:rPr>
               <a:t>What do you like about this essay?</a:t>
             </a:r>
-            <a:endParaRPr lang="en-US" sz="2600" dirty="0"/>
+            <a:endParaRPr lang="en-US" sz="2800" dirty="0"/>
           </a:p>
         </p:txBody>
       </p:sp>
@@ -3354,12 +3443,12 @@
         </p:nvSpPr>
         <p:spPr>
           <a:xfrm>
-            <a:off x="4399178" y="1965960"/>
-            <a:ext cx="3393338" cy="3749040"/>
+            <a:off x="4399178" y="2652268"/>
+            <a:ext cx="3393338" cy="2742184"/>
           </a:xfrm>
           <a:prstGeom prst="roundRect">
             <a:avLst>
-              <a:gd name="adj" fmla="val 3773"/>
+              <a:gd name="adj" fmla="val 4668"/>
             </a:avLst>
           </a:prstGeom>
           <a:solidFill>
@@ -3388,7 +3477,7 @@
         </p:nvSpPr>
         <p:spPr>
           <a:xfrm>
-            <a:off x="4527194" y="1965960"/>
+            <a:off x="4527194" y="2652268"/>
             <a:ext cx="3137306" cy="91440"/>
           </a:xfrm>
           <a:prstGeom prst="rect">
@@ -3413,7 +3502,7 @@
         </p:nvSpPr>
         <p:spPr>
           <a:xfrm>
-            <a:off x="4719218" y="2331720"/>
+            <a:off x="4719218" y="3018028"/>
             <a:ext cx="731520" cy="731520"/>
           </a:xfrm>
           <a:prstGeom prst="ellipse">
@@ -3438,7 +3527,7 @@
         </p:nvSpPr>
         <p:spPr>
           <a:xfrm>
-            <a:off x="4719218" y="2331720"/>
+            <a:off x="4719218" y="3018028"/>
             <a:ext cx="731520" cy="731520"/>
           </a:xfrm>
           <a:prstGeom prst="rect">
@@ -3477,8 +3566,8 @@
         </p:nvSpPr>
         <p:spPr>
           <a:xfrm>
-            <a:off x="4719218" y="3246120"/>
-            <a:ext cx="2753258" cy="2286000"/>
+            <a:off x="4719218" y="3932428"/>
+            <a:ext cx="2753258" cy="1279144"/>
           </a:xfrm>
           <a:prstGeom prst="rect">
             <a:avLst/>
@@ -3494,7 +3583,7 @@
               <a:buNone/>
             </a:pPr>
             <a:r>
-              <a:rPr lang="en-US" sz="2600" dirty="0">
+              <a:rPr lang="en-US" sz="2800" dirty="0">
                 <a:solidFill>
                   <a:srgbClr val="3C3828"/>
                 </a:solidFill>
@@ -3504,7 +3593,7 @@
               </a:rPr>
               <a:t>Do you agree with the writer?</a:t>
             </a:r>
-            <a:endParaRPr lang="en-US" sz="2600" dirty="0"/>
+            <a:endParaRPr lang="en-US" sz="2800" dirty="0"/>
           </a:p>
         </p:txBody>
       </p:sp>
@@ -3516,12 +3605,12 @@
         </p:nvSpPr>
         <p:spPr>
           <a:xfrm>
-            <a:off x="8112557" y="1965960"/>
-            <a:ext cx="3393338" cy="3749040"/>
+            <a:off x="8112557" y="2652268"/>
+            <a:ext cx="3393338" cy="2742184"/>
           </a:xfrm>
           <a:prstGeom prst="roundRect">
             <a:avLst>
-              <a:gd name="adj" fmla="val 3773"/>
+              <a:gd name="adj" fmla="val 4668"/>
             </a:avLst>
           </a:prstGeom>
           <a:solidFill>
@@ -3550,7 +3639,7 @@
         </p:nvSpPr>
         <p:spPr>
           <a:xfrm>
-            <a:off x="8240573" y="1965960"/>
+            <a:off x="8240573" y="2652268"/>
             <a:ext cx="3137306" cy="91440"/>
           </a:xfrm>
           <a:prstGeom prst="rect">
@@ -3575,7 +3664,7 @@
         </p:nvSpPr>
         <p:spPr>
           <a:xfrm>
-            <a:off x="8432597" y="2331720"/>
+            <a:off x="8432597" y="3018028"/>
             <a:ext cx="731520" cy="731520"/>
           </a:xfrm>
           <a:prstGeom prst="ellipse">
@@ -3600,7 +3689,7 @@
         </p:nvSpPr>
         <p:spPr>
           <a:xfrm>
-            <a:off x="8432597" y="2331720"/>
+            <a:off x="8432597" y="3018028"/>
             <a:ext cx="731520" cy="731520"/>
           </a:xfrm>
           <a:prstGeom prst="rect">
@@ -3639,8 +3728,8 @@
         </p:nvSpPr>
         <p:spPr>
           <a:xfrm>
-            <a:off x="8432597" y="3246120"/>
-            <a:ext cx="2753258" cy="2286000"/>
+            <a:off x="8432597" y="3932428"/>
+            <a:ext cx="2753258" cy="1279144"/>
           </a:xfrm>
           <a:prstGeom prst="rect">
             <a:avLst/>
@@ -3656,7 +3745,7 @@
               <a:buNone/>
             </a:pPr>
             <a:r>
-              <a:rPr lang="en-US" sz="2600" dirty="0">
+              <a:rPr lang="en-US" sz="2800" dirty="0">
                 <a:solidFill>
                   <a:srgbClr val="3C3828"/>
                 </a:solidFill>
@@ -3667,7 +3756,7 @@
               <a:t>What is the </a:t>
             </a:r>
             <a:r>
-              <a:rPr lang="en-US" sz="2600" dirty="0">
+              <a:rPr lang="en-US" sz="2800" dirty="0">
                 <a:solidFill>
                   <a:srgbClr val="3C3828"/>
                 </a:solidFill>
@@ -3680,7 +3769,7 @@
               </a:rPr>
               <a:t>main point or argument?</a:t>
             </a:r>
-            <a:endParaRPr lang="en-US" sz="2600" dirty="0"/>
+            <a:endParaRPr lang="en-US" sz="2800" dirty="0"/>
           </a:p>
         </p:txBody>
       </p:sp>
@@ -3765,7 +3854,7 @@
         </p:nvSpPr>
         <p:spPr>
           <a:xfrm>
-            <a:off x="685800" y="502920"/>
+            <a:off x="685800" y="274320"/>
             <a:ext cx="9357055" cy="320040"/>
           </a:xfrm>
           <a:prstGeom prst="rect">
@@ -3804,8 +3893,8 @@
         </p:nvSpPr>
         <p:spPr>
           <a:xfrm>
-            <a:off x="685800" y="868680"/>
-            <a:ext cx="9357055" cy="960120"/>
+            <a:off x="685800" y="621792"/>
+            <a:ext cx="9357055" cy="640080"/>
           </a:xfrm>
           <a:prstGeom prst="rect">
             <a:avLst/>
@@ -3821,7 +3910,7 @@
               <a:buNone/>
             </a:pPr>
             <a:r>
-              <a:rPr lang="en-US" sz="3600" dirty="0">
+              <a:rPr lang="en-US" sz="3200" dirty="0">
                 <a:solidFill>
                   <a:srgbClr val="3C3828"/>
                 </a:solidFill>
@@ -3829,9 +3918,9 @@
                 <a:ea typeface="Georgia" pitchFamily="34" charset="-122"/>
                 <a:cs typeface="Georgia" pitchFamily="34" charset="-120"/>
               </a:rPr>
-              <a:t>The Critical Essay Form</a:t>
-            </a:r>
-            <a:endParaRPr lang="en-US" sz="3600" dirty="0"/>
+              <a:t>The Critical Essay Form</a:t>
+            </a:r>
+            <a:endParaRPr lang="en-US" sz="3200" dirty="0"/>
           </a:p>
         </p:txBody>
       </p:sp>
@@ -3843,12 +3932,12 @@
         </p:nvSpPr>
         <p:spPr>
           <a:xfrm>
-            <a:off x="685800" y="1828800"/>
-            <a:ext cx="3355277" cy="4343400"/>
+            <a:off x="685800" y="1417320"/>
+            <a:ext cx="3708464" cy="4800600"/>
           </a:xfrm>
           <a:prstGeom prst="roundRect">
             <a:avLst>
-              <a:gd name="adj" fmla="val 3815"/>
+              <a:gd name="adj" fmla="val 3452"/>
             </a:avLst>
           </a:prstGeom>
           <a:solidFill>
@@ -3885,8 +3974,8 @@
         </p:blipFill>
         <p:spPr>
           <a:xfrm>
-            <a:off x="813816" y="1956816"/>
-            <a:ext cx="3099245" cy="4087368"/>
+            <a:off x="813816" y="1545336"/>
+            <a:ext cx="3452432" cy="4544568"/>
           </a:xfrm>
           <a:prstGeom prst="rect">
             <a:avLst/>
@@ -3901,8 +3990,8 @@
         </p:nvSpPr>
         <p:spPr>
           <a:xfrm>
-            <a:off x="4589717" y="2505456"/>
-            <a:ext cx="292608" cy="292608"/>
+            <a:off x="1517373" y="2316541"/>
+            <a:ext cx="457200" cy="457200"/>
           </a:xfrm>
           <a:prstGeom prst="ellipse">
             <a:avLst/>
@@ -3910,12 +3999,19 @@
           <a:solidFill>
             <a:srgbClr val="02BDC7"/>
           </a:solidFill>
-          <a:ln w="12700">
-            <a:solidFill>
-              <a:srgbClr val="02BDC7"/>
-            </a:solidFill>
-            <a:prstDash val="solid"/>
-          </a:ln>
+          <a:ln w="25400">
+            <a:solidFill>
+              <a:srgbClr val="FFFEFA"/>
+            </a:solidFill>
+            <a:prstDash val="solid"/>
+          </a:ln>
+          <a:effectLst>
+            <a:outerShdw sx="100000" sy="100000" kx="0" ky="0" algn="bl" rotWithShape="0" blurRad="50800" dist="19050" dir="5400000">
+              <a:srgbClr val="3C3828">
+                <a:alpha val="25000"/>
+              </a:srgbClr>
+            </a:outerShdw>
+          </a:effectLst>
         </p:spPr>
       </p:sp>
       <p:sp>
@@ -3926,8 +4022,331 @@
         </p:nvSpPr>
         <p:spPr>
           <a:xfrm>
-            <a:off x="5065205" y="2194560"/>
-            <a:ext cx="6440691" cy="914400"/>
+            <a:off x="1517373" y="2316541"/>
+            <a:ext cx="457200" cy="457200"/>
+          </a:xfrm>
+          <a:prstGeom prst="rect">
+            <a:avLst/>
+          </a:prstGeom>
+          <a:noFill/>
+          <a:ln/>
+        </p:spPr>
+        <p:txBody>
+          <a:bodyPr wrap="square" lIns="0" tIns="0" rIns="0" bIns="0" rtlCol="0" anchor="ctr"/>
+          <a:lstStyle/>
+          <a:p>
+            <a:pPr algn="ctr" indent="0" marL="0">
+              <a:buNone/>
+            </a:pPr>
+            <a:r>
+              <a:rPr lang="en-US" sz="1800" b="1" dirty="0">
+                <a:solidFill>
+                  <a:srgbClr val="FFFEFA"/>
+                </a:solidFill>
+                <a:latin typeface="Georgia" pitchFamily="34" charset="0"/>
+                <a:ea typeface="Georgia" pitchFamily="34" charset="-122"/>
+                <a:cs typeface="Georgia" pitchFamily="34" charset="-120"/>
+              </a:rPr>
+              <a:t>1</a:t>
+            </a:r>
+            <a:endParaRPr lang="en-US" sz="1800" dirty="0"/>
+          </a:p>
+        </p:txBody>
+      </p:sp>
+      <p:sp>
+        <p:nvSpPr>
+          <p:cNvPr id="8" name="Shape 5"/>
+          <p:cNvSpPr/>
+          <p:nvPr/>
+        </p:nvSpPr>
+        <p:spPr>
+          <a:xfrm>
+            <a:off x="2725724" y="2998226"/>
+            <a:ext cx="457200" cy="457200"/>
+          </a:xfrm>
+          <a:prstGeom prst="ellipse">
+            <a:avLst/>
+          </a:prstGeom>
+          <a:solidFill>
+            <a:srgbClr val="FFB600"/>
+          </a:solidFill>
+          <a:ln w="25400">
+            <a:solidFill>
+              <a:srgbClr val="FFFEFA"/>
+            </a:solidFill>
+            <a:prstDash val="solid"/>
+          </a:ln>
+          <a:effectLst>
+            <a:outerShdw sx="100000" sy="100000" kx="0" ky="0" algn="bl" rotWithShape="0" blurRad="50800" dist="19050" dir="5400000">
+              <a:srgbClr val="3C3828">
+                <a:alpha val="25000"/>
+              </a:srgbClr>
+            </a:outerShdw>
+          </a:effectLst>
+        </p:spPr>
+      </p:sp>
+      <p:sp>
+        <p:nvSpPr>
+          <p:cNvPr id="9" name="Text 6"/>
+          <p:cNvSpPr/>
+          <p:nvPr/>
+        </p:nvSpPr>
+        <p:spPr>
+          <a:xfrm>
+            <a:off x="2725724" y="2998226"/>
+            <a:ext cx="457200" cy="457200"/>
+          </a:xfrm>
+          <a:prstGeom prst="rect">
+            <a:avLst/>
+          </a:prstGeom>
+          <a:noFill/>
+          <a:ln/>
+        </p:spPr>
+        <p:txBody>
+          <a:bodyPr wrap="square" lIns="0" tIns="0" rIns="0" bIns="0" rtlCol="0" anchor="ctr"/>
+          <a:lstStyle/>
+          <a:p>
+            <a:pPr algn="ctr" indent="0" marL="0">
+              <a:buNone/>
+            </a:pPr>
+            <a:r>
+              <a:rPr lang="en-US" sz="1800" b="1" dirty="0">
+                <a:solidFill>
+                  <a:srgbClr val="FFFEFA"/>
+                </a:solidFill>
+                <a:latin typeface="Georgia" pitchFamily="34" charset="0"/>
+                <a:ea typeface="Georgia" pitchFamily="34" charset="-122"/>
+                <a:cs typeface="Georgia" pitchFamily="34" charset="-120"/>
+              </a:rPr>
+              <a:t>2</a:t>
+            </a:r>
+            <a:endParaRPr lang="en-US" sz="1800" dirty="0"/>
+          </a:p>
+        </p:txBody>
+      </p:sp>
+      <p:sp>
+        <p:nvSpPr>
+          <p:cNvPr id="10" name="Shape 7"/>
+          <p:cNvSpPr/>
+          <p:nvPr/>
+        </p:nvSpPr>
+        <p:spPr>
+          <a:xfrm>
+            <a:off x="2863821" y="3725357"/>
+            <a:ext cx="457200" cy="457200"/>
+          </a:xfrm>
+          <a:prstGeom prst="ellipse">
+            <a:avLst/>
+          </a:prstGeom>
+          <a:solidFill>
+            <a:srgbClr val="FC4540"/>
+          </a:solidFill>
+          <a:ln w="25400">
+            <a:solidFill>
+              <a:srgbClr val="FFFEFA"/>
+            </a:solidFill>
+            <a:prstDash val="solid"/>
+          </a:ln>
+          <a:effectLst>
+            <a:outerShdw sx="100000" sy="100000" kx="0" ky="0" algn="bl" rotWithShape="0" blurRad="50800" dist="19050" dir="5400000">
+              <a:srgbClr val="3C3828">
+                <a:alpha val="25000"/>
+              </a:srgbClr>
+            </a:outerShdw>
+          </a:effectLst>
+        </p:spPr>
+      </p:sp>
+      <p:sp>
+        <p:nvSpPr>
+          <p:cNvPr id="11" name="Text 8"/>
+          <p:cNvSpPr/>
+          <p:nvPr/>
+        </p:nvSpPr>
+        <p:spPr>
+          <a:xfrm>
+            <a:off x="2863821" y="3725357"/>
+            <a:ext cx="457200" cy="457200"/>
+          </a:xfrm>
+          <a:prstGeom prst="rect">
+            <a:avLst/>
+          </a:prstGeom>
+          <a:noFill/>
+          <a:ln/>
+        </p:spPr>
+        <p:txBody>
+          <a:bodyPr wrap="square" lIns="0" tIns="0" rIns="0" bIns="0" rtlCol="0" anchor="ctr"/>
+          <a:lstStyle/>
+          <a:p>
+            <a:pPr algn="ctr" indent="0" marL="0">
+              <a:buNone/>
+            </a:pPr>
+            <a:r>
+              <a:rPr lang="en-US" sz="1800" b="1" dirty="0">
+                <a:solidFill>
+                  <a:srgbClr val="FFFEFA"/>
+                </a:solidFill>
+                <a:latin typeface="Georgia" pitchFamily="34" charset="0"/>
+                <a:ea typeface="Georgia" pitchFamily="34" charset="-122"/>
+                <a:cs typeface="Georgia" pitchFamily="34" charset="-120"/>
+              </a:rPr>
+              <a:t>3</a:t>
+            </a:r>
+            <a:endParaRPr lang="en-US" sz="1800" dirty="0"/>
+          </a:p>
+        </p:txBody>
+      </p:sp>
+      <p:sp>
+        <p:nvSpPr>
+          <p:cNvPr id="12" name="Shape 9"/>
+          <p:cNvSpPr/>
+          <p:nvPr/>
+        </p:nvSpPr>
+        <p:spPr>
+          <a:xfrm>
+            <a:off x="3105491" y="5043282"/>
+            <a:ext cx="457200" cy="457200"/>
+          </a:xfrm>
+          <a:prstGeom prst="ellipse">
+            <a:avLst/>
+          </a:prstGeom>
+          <a:solidFill>
+            <a:srgbClr val="FF9755"/>
+          </a:solidFill>
+          <a:ln w="25400">
+            <a:solidFill>
+              <a:srgbClr val="FFFEFA"/>
+            </a:solidFill>
+            <a:prstDash val="solid"/>
+          </a:ln>
+          <a:effectLst>
+            <a:outerShdw sx="100000" sy="100000" kx="0" ky="0" algn="bl" rotWithShape="0" blurRad="50800" dist="19050" dir="5400000">
+              <a:srgbClr val="3C3828">
+                <a:alpha val="25000"/>
+              </a:srgbClr>
+            </a:outerShdw>
+          </a:effectLst>
+        </p:spPr>
+      </p:sp>
+      <p:sp>
+        <p:nvSpPr>
+          <p:cNvPr id="13" name="Text 10"/>
+          <p:cNvSpPr/>
+          <p:nvPr/>
+        </p:nvSpPr>
+        <p:spPr>
+          <a:xfrm>
+            <a:off x="3105491" y="5043282"/>
+            <a:ext cx="457200" cy="457200"/>
+          </a:xfrm>
+          <a:prstGeom prst="rect">
+            <a:avLst/>
+          </a:prstGeom>
+          <a:noFill/>
+          <a:ln/>
+        </p:spPr>
+        <p:txBody>
+          <a:bodyPr wrap="square" lIns="0" tIns="0" rIns="0" bIns="0" rtlCol="0" anchor="ctr"/>
+          <a:lstStyle/>
+          <a:p>
+            <a:pPr algn="ctr" indent="0" marL="0">
+              <a:buNone/>
+            </a:pPr>
+            <a:r>
+              <a:rPr lang="en-US" sz="1800" b="1" dirty="0">
+                <a:solidFill>
+                  <a:srgbClr val="FFFEFA"/>
+                </a:solidFill>
+                <a:latin typeface="Georgia" pitchFamily="34" charset="0"/>
+                <a:ea typeface="Georgia" pitchFamily="34" charset="-122"/>
+                <a:cs typeface="Georgia" pitchFamily="34" charset="-120"/>
+              </a:rPr>
+              <a:t>4</a:t>
+            </a:r>
+            <a:endParaRPr lang="en-US" sz="1800" dirty="0"/>
+          </a:p>
+        </p:txBody>
+      </p:sp>
+      <p:sp>
+        <p:nvSpPr>
+          <p:cNvPr id="14" name="Shape 11"/>
+          <p:cNvSpPr/>
+          <p:nvPr/>
+        </p:nvSpPr>
+        <p:spPr>
+          <a:xfrm>
+            <a:off x="4851464" y="2348484"/>
+            <a:ext cx="457200" cy="457200"/>
+          </a:xfrm>
+          <a:prstGeom prst="ellipse">
+            <a:avLst/>
+          </a:prstGeom>
+          <a:solidFill>
+            <a:srgbClr val="02BDC7"/>
+          </a:solidFill>
+          <a:ln w="25400">
+            <a:solidFill>
+              <a:srgbClr val="FFFEFA"/>
+            </a:solidFill>
+            <a:prstDash val="solid"/>
+          </a:ln>
+          <a:effectLst>
+            <a:outerShdw sx="100000" sy="100000" kx="0" ky="0" algn="bl" rotWithShape="0" blurRad="50800" dist="19050" dir="5400000">
+              <a:srgbClr val="3C3828">
+                <a:alpha val="25000"/>
+              </a:srgbClr>
+            </a:outerShdw>
+          </a:effectLst>
+        </p:spPr>
+      </p:sp>
+      <p:sp>
+        <p:nvSpPr>
+          <p:cNvPr id="15" name="Text 12"/>
+          <p:cNvSpPr/>
+          <p:nvPr/>
+        </p:nvSpPr>
+        <p:spPr>
+          <a:xfrm>
+            <a:off x="4851464" y="2348484"/>
+            <a:ext cx="457200" cy="457200"/>
+          </a:xfrm>
+          <a:prstGeom prst="rect">
+            <a:avLst/>
+          </a:prstGeom>
+          <a:noFill/>
+          <a:ln/>
+        </p:spPr>
+        <p:txBody>
+          <a:bodyPr wrap="square" lIns="0" tIns="0" rIns="0" bIns="0" rtlCol="0" anchor="ctr"/>
+          <a:lstStyle/>
+          <a:p>
+            <a:pPr algn="ctr" indent="0" marL="0">
+              <a:buNone/>
+            </a:pPr>
+            <a:r>
+              <a:rPr lang="en-US" sz="1800" b="1" dirty="0">
+                <a:solidFill>
+                  <a:srgbClr val="FFFEFA"/>
+                </a:solidFill>
+                <a:latin typeface="Georgia" pitchFamily="34" charset="0"/>
+                <a:ea typeface="Georgia" pitchFamily="34" charset="-122"/>
+                <a:cs typeface="Georgia" pitchFamily="34" charset="-120"/>
+              </a:rPr>
+              <a:t>1</a:t>
+            </a:r>
+            <a:endParaRPr lang="en-US" sz="1800" dirty="0"/>
+          </a:p>
+        </p:txBody>
+      </p:sp>
+      <p:sp>
+        <p:nvSpPr>
+          <p:cNvPr id="16" name="Text 13"/>
+          <p:cNvSpPr/>
+          <p:nvPr/>
+        </p:nvSpPr>
+        <p:spPr>
+          <a:xfrm>
+            <a:off x="5491544" y="2211324"/>
+            <a:ext cx="6014352" cy="731520"/>
           </a:xfrm>
           <a:prstGeom prst="rect">
             <a:avLst/>
@@ -3959,14 +4378,14 @@
       </p:sp>
       <p:sp>
         <p:nvSpPr>
-          <p:cNvPr id="8" name="Shape 5"/>
-          <p:cNvSpPr/>
-          <p:nvPr/>
-        </p:nvSpPr>
-        <p:spPr>
-          <a:xfrm>
-            <a:off x="4589717" y="3419856"/>
-            <a:ext cx="292608" cy="292608"/>
+          <p:cNvPr id="17" name="Shape 14"/>
+          <p:cNvSpPr/>
+          <p:nvPr/>
+        </p:nvSpPr>
+        <p:spPr>
+          <a:xfrm>
+            <a:off x="4851464" y="3223260"/>
+            <a:ext cx="457200" cy="457200"/>
           </a:xfrm>
           <a:prstGeom prst="ellipse">
             <a:avLst/>
@@ -3974,24 +4393,70 @@
           <a:solidFill>
             <a:srgbClr val="FFB600"/>
           </a:solidFill>
-          <a:ln w="12700">
-            <a:solidFill>
-              <a:srgbClr val="FFB600"/>
-            </a:solidFill>
-            <a:prstDash val="solid"/>
-          </a:ln>
-        </p:spPr>
-      </p:sp>
-      <p:sp>
-        <p:nvSpPr>
-          <p:cNvPr id="9" name="Text 6"/>
-          <p:cNvSpPr/>
-          <p:nvPr/>
-        </p:nvSpPr>
-        <p:spPr>
-          <a:xfrm>
-            <a:off x="5065205" y="3108960"/>
-            <a:ext cx="6440691" cy="914400"/>
+          <a:ln w="25400">
+            <a:solidFill>
+              <a:srgbClr val="FFFEFA"/>
+            </a:solidFill>
+            <a:prstDash val="solid"/>
+          </a:ln>
+          <a:effectLst>
+            <a:outerShdw sx="100000" sy="100000" kx="0" ky="0" algn="bl" rotWithShape="0" blurRad="50800" dist="19050" dir="5400000">
+              <a:srgbClr val="3C3828">
+                <a:alpha val="25000"/>
+              </a:srgbClr>
+            </a:outerShdw>
+          </a:effectLst>
+        </p:spPr>
+      </p:sp>
+      <p:sp>
+        <p:nvSpPr>
+          <p:cNvPr id="18" name="Text 15"/>
+          <p:cNvSpPr/>
+          <p:nvPr/>
+        </p:nvSpPr>
+        <p:spPr>
+          <a:xfrm>
+            <a:off x="4851464" y="3223260"/>
+            <a:ext cx="457200" cy="457200"/>
+          </a:xfrm>
+          <a:prstGeom prst="rect">
+            <a:avLst/>
+          </a:prstGeom>
+          <a:noFill/>
+          <a:ln/>
+        </p:spPr>
+        <p:txBody>
+          <a:bodyPr wrap="square" lIns="0" tIns="0" rIns="0" bIns="0" rtlCol="0" anchor="ctr"/>
+          <a:lstStyle/>
+          <a:p>
+            <a:pPr algn="ctr" indent="0" marL="0">
+              <a:buNone/>
+            </a:pPr>
+            <a:r>
+              <a:rPr lang="en-US" sz="1800" b="1" dirty="0">
+                <a:solidFill>
+                  <a:srgbClr val="FFFEFA"/>
+                </a:solidFill>
+                <a:latin typeface="Georgia" pitchFamily="34" charset="0"/>
+                <a:ea typeface="Georgia" pitchFamily="34" charset="-122"/>
+                <a:cs typeface="Georgia" pitchFamily="34" charset="-120"/>
+              </a:rPr>
+              <a:t>2</a:t>
+            </a:r>
+            <a:endParaRPr lang="en-US" sz="1800" dirty="0"/>
+          </a:p>
+        </p:txBody>
+      </p:sp>
+      <p:sp>
+        <p:nvSpPr>
+          <p:cNvPr id="19" name="Text 16"/>
+          <p:cNvSpPr/>
+          <p:nvPr/>
+        </p:nvSpPr>
+        <p:spPr>
+          <a:xfrm>
+            <a:off x="5491544" y="2942844"/>
+            <a:ext cx="6014352" cy="1018032"/>
           </a:xfrm>
           <a:prstGeom prst="rect">
             <a:avLst/>
@@ -4037,14 +4502,14 @@
       </p:sp>
       <p:sp>
         <p:nvSpPr>
-          <p:cNvPr id="10" name="Shape 7"/>
-          <p:cNvSpPr/>
-          <p:nvPr/>
-        </p:nvSpPr>
-        <p:spPr>
-          <a:xfrm>
-            <a:off x="4589717" y="4334256"/>
-            <a:ext cx="292608" cy="292608"/>
+          <p:cNvPr id="20" name="Shape 17"/>
+          <p:cNvSpPr/>
+          <p:nvPr/>
+        </p:nvSpPr>
+        <p:spPr>
+          <a:xfrm>
+            <a:off x="4851464" y="4098036"/>
+            <a:ext cx="457200" cy="457200"/>
           </a:xfrm>
           <a:prstGeom prst="ellipse">
             <a:avLst/>
@@ -4052,24 +4517,70 @@
           <a:solidFill>
             <a:srgbClr val="FC4540"/>
           </a:solidFill>
-          <a:ln w="12700">
-            <a:solidFill>
-              <a:srgbClr val="FC4540"/>
-            </a:solidFill>
-            <a:prstDash val="solid"/>
-          </a:ln>
-        </p:spPr>
-      </p:sp>
-      <p:sp>
-        <p:nvSpPr>
-          <p:cNvPr id="11" name="Text 8"/>
-          <p:cNvSpPr/>
-          <p:nvPr/>
-        </p:nvSpPr>
-        <p:spPr>
-          <a:xfrm>
-            <a:off x="5065205" y="4023360"/>
-            <a:ext cx="6440691" cy="914400"/>
+          <a:ln w="25400">
+            <a:solidFill>
+              <a:srgbClr val="FFFEFA"/>
+            </a:solidFill>
+            <a:prstDash val="solid"/>
+          </a:ln>
+          <a:effectLst>
+            <a:outerShdw sx="100000" sy="100000" kx="0" ky="0" algn="bl" rotWithShape="0" blurRad="50800" dist="19050" dir="5400000">
+              <a:srgbClr val="3C3828">
+                <a:alpha val="25000"/>
+              </a:srgbClr>
+            </a:outerShdw>
+          </a:effectLst>
+        </p:spPr>
+      </p:sp>
+      <p:sp>
+        <p:nvSpPr>
+          <p:cNvPr id="21" name="Text 18"/>
+          <p:cNvSpPr/>
+          <p:nvPr/>
+        </p:nvSpPr>
+        <p:spPr>
+          <a:xfrm>
+            <a:off x="4851464" y="4098036"/>
+            <a:ext cx="457200" cy="457200"/>
+          </a:xfrm>
+          <a:prstGeom prst="rect">
+            <a:avLst/>
+          </a:prstGeom>
+          <a:noFill/>
+          <a:ln/>
+        </p:spPr>
+        <p:txBody>
+          <a:bodyPr wrap="square" lIns="0" tIns="0" rIns="0" bIns="0" rtlCol="0" anchor="ctr"/>
+          <a:lstStyle/>
+          <a:p>
+            <a:pPr algn="ctr" indent="0" marL="0">
+              <a:buNone/>
+            </a:pPr>
+            <a:r>
+              <a:rPr lang="en-US" sz="1800" b="1" dirty="0">
+                <a:solidFill>
+                  <a:srgbClr val="FFFEFA"/>
+                </a:solidFill>
+                <a:latin typeface="Georgia" pitchFamily="34" charset="0"/>
+                <a:ea typeface="Georgia" pitchFamily="34" charset="-122"/>
+                <a:cs typeface="Georgia" pitchFamily="34" charset="-120"/>
+              </a:rPr>
+              <a:t>3</a:t>
+            </a:r>
+            <a:endParaRPr lang="en-US" sz="1800" dirty="0"/>
+          </a:p>
+        </p:txBody>
+      </p:sp>
+      <p:sp>
+        <p:nvSpPr>
+          <p:cNvPr id="22" name="Text 19"/>
+          <p:cNvSpPr/>
+          <p:nvPr/>
+        </p:nvSpPr>
+        <p:spPr>
+          <a:xfrm>
+            <a:off x="5491544" y="3960876"/>
+            <a:ext cx="6014352" cy="731520"/>
           </a:xfrm>
           <a:prstGeom prst="rect">
             <a:avLst/>
@@ -4101,14 +4612,14 @@
       </p:sp>
       <p:sp>
         <p:nvSpPr>
-          <p:cNvPr id="12" name="Shape 9"/>
-          <p:cNvSpPr/>
-          <p:nvPr/>
-        </p:nvSpPr>
-        <p:spPr>
-          <a:xfrm>
-            <a:off x="4589717" y="5248656"/>
-            <a:ext cx="292608" cy="292608"/>
+          <p:cNvPr id="23" name="Shape 20"/>
+          <p:cNvSpPr/>
+          <p:nvPr/>
+        </p:nvSpPr>
+        <p:spPr>
+          <a:xfrm>
+            <a:off x="4851464" y="4829556"/>
+            <a:ext cx="457200" cy="457200"/>
           </a:xfrm>
           <a:prstGeom prst="ellipse">
             <a:avLst/>
@@ -4116,24 +4627,70 @@
           <a:solidFill>
             <a:srgbClr val="FF9755"/>
           </a:solidFill>
-          <a:ln w="12700">
-            <a:solidFill>
-              <a:srgbClr val="FF9755"/>
-            </a:solidFill>
-            <a:prstDash val="solid"/>
-          </a:ln>
-        </p:spPr>
-      </p:sp>
-      <p:sp>
-        <p:nvSpPr>
-          <p:cNvPr id="13" name="Text 10"/>
-          <p:cNvSpPr/>
-          <p:nvPr/>
-        </p:nvSpPr>
-        <p:spPr>
-          <a:xfrm>
-            <a:off x="5065205" y="4937760"/>
-            <a:ext cx="6440691" cy="914400"/>
+          <a:ln w="25400">
+            <a:solidFill>
+              <a:srgbClr val="FFFEFA"/>
+            </a:solidFill>
+            <a:prstDash val="solid"/>
+          </a:ln>
+          <a:effectLst>
+            <a:outerShdw sx="100000" sy="100000" kx="0" ky="0" algn="bl" rotWithShape="0" blurRad="50800" dist="19050" dir="5400000">
+              <a:srgbClr val="3C3828">
+                <a:alpha val="25000"/>
+              </a:srgbClr>
+            </a:outerShdw>
+          </a:effectLst>
+        </p:spPr>
+      </p:sp>
+      <p:sp>
+        <p:nvSpPr>
+          <p:cNvPr id="24" name="Text 21"/>
+          <p:cNvSpPr/>
+          <p:nvPr/>
+        </p:nvSpPr>
+        <p:spPr>
+          <a:xfrm>
+            <a:off x="4851464" y="4829556"/>
+            <a:ext cx="457200" cy="457200"/>
+          </a:xfrm>
+          <a:prstGeom prst="rect">
+            <a:avLst/>
+          </a:prstGeom>
+          <a:noFill/>
+          <a:ln/>
+        </p:spPr>
+        <p:txBody>
+          <a:bodyPr wrap="square" lIns="0" tIns="0" rIns="0" bIns="0" rtlCol="0" anchor="ctr"/>
+          <a:lstStyle/>
+          <a:p>
+            <a:pPr algn="ctr" indent="0" marL="0">
+              <a:buNone/>
+            </a:pPr>
+            <a:r>
+              <a:rPr lang="en-US" sz="1800" b="1" dirty="0">
+                <a:solidFill>
+                  <a:srgbClr val="FFFEFA"/>
+                </a:solidFill>
+                <a:latin typeface="Georgia" pitchFamily="34" charset="0"/>
+                <a:ea typeface="Georgia" pitchFamily="34" charset="-122"/>
+                <a:cs typeface="Georgia" pitchFamily="34" charset="-120"/>
+              </a:rPr>
+              <a:t>4</a:t>
+            </a:r>
+            <a:endParaRPr lang="en-US" sz="1800" dirty="0"/>
+          </a:p>
+        </p:txBody>
+      </p:sp>
+      <p:sp>
+        <p:nvSpPr>
+          <p:cNvPr id="25" name="Text 22"/>
+          <p:cNvSpPr/>
+          <p:nvPr/>
+        </p:nvSpPr>
+        <p:spPr>
+          <a:xfrm>
+            <a:off x="5491544" y="4692396"/>
+            <a:ext cx="6014352" cy="731520"/>
           </a:xfrm>
           <a:prstGeom prst="rect">
             <a:avLst/>
@@ -4308,7 +4865,7 @@
                 <a:ea typeface="Georgia" pitchFamily="34" charset="-122"/>
                 <a:cs typeface="Georgia" pitchFamily="34" charset="-120"/>
               </a:rPr>
-              <a:t>What are we doing here?</a:t>
+              <a:t>What are we doing here?</a:t>
             </a:r>
             <a:endParaRPr lang="en-US" sz="3600" dirty="0"/>
           </a:p>
@@ -4485,12 +5042,12 @@
         </p:nvSpPr>
         <p:spPr>
           <a:xfrm>
-            <a:off x="685800" y="2971800"/>
-            <a:ext cx="3393338" cy="3108960"/>
+            <a:off x="685800" y="2984754"/>
+            <a:ext cx="3393338" cy="3083052"/>
           </a:xfrm>
           <a:prstGeom prst="roundRect">
             <a:avLst>
-              <a:gd name="adj" fmla="val 4118"/>
+              <a:gd name="adj" fmla="val 4152"/>
             </a:avLst>
           </a:prstGeom>
           <a:solidFill>
@@ -4519,7 +5076,7 @@
         </p:nvSpPr>
         <p:spPr>
           <a:xfrm>
-            <a:off x="813816" y="2971800"/>
+            <a:off x="813816" y="2984754"/>
             <a:ext cx="3137306" cy="91440"/>
           </a:xfrm>
           <a:prstGeom prst="rect">
@@ -4544,7 +5101,7 @@
         </p:nvSpPr>
         <p:spPr>
           <a:xfrm>
-            <a:off x="1005840" y="3337560"/>
+            <a:off x="1005840" y="3350514"/>
             <a:ext cx="731520" cy="731520"/>
           </a:xfrm>
           <a:prstGeom prst="ellipse">
@@ -4569,7 +5126,7 @@
         </p:nvSpPr>
         <p:spPr>
           <a:xfrm>
-            <a:off x="1005840" y="3337560"/>
+            <a:off x="1005840" y="3350514"/>
             <a:ext cx="731520" cy="731520"/>
           </a:xfrm>
           <a:prstGeom prst="rect">
@@ -4608,8 +5165,8 @@
         </p:nvSpPr>
         <p:spPr>
           <a:xfrm>
-            <a:off x="1005840" y="4251960"/>
-            <a:ext cx="2753258" cy="1645920"/>
+            <a:off x="1005840" y="4264914"/>
+            <a:ext cx="2753258" cy="1620012"/>
           </a:xfrm>
           <a:prstGeom prst="rect">
             <a:avLst/>
@@ -4647,12 +5204,12 @@
         </p:nvSpPr>
         <p:spPr>
           <a:xfrm>
-            <a:off x="4399178" y="2971800"/>
-            <a:ext cx="3393338" cy="3108960"/>
+            <a:off x="4399178" y="2984754"/>
+            <a:ext cx="3393338" cy="3083052"/>
           </a:xfrm>
           <a:prstGeom prst="roundRect">
             <a:avLst>
-              <a:gd name="adj" fmla="val 4118"/>
+              <a:gd name="adj" fmla="val 4152"/>
             </a:avLst>
           </a:prstGeom>
           <a:solidFill>
@@ -4681,7 +5238,7 @@
         </p:nvSpPr>
         <p:spPr>
           <a:xfrm>
-            <a:off x="4527194" y="2971800"/>
+            <a:off x="4527194" y="2984754"/>
             <a:ext cx="3137306" cy="91440"/>
           </a:xfrm>
           <a:prstGeom prst="rect">
@@ -4706,7 +5263,7 @@
         </p:nvSpPr>
         <p:spPr>
           <a:xfrm>
-            <a:off x="4719218" y="3337560"/>
+            <a:off x="4719218" y="3350514"/>
             <a:ext cx="731520" cy="731520"/>
           </a:xfrm>
           <a:prstGeom prst="ellipse">
@@ -4731,7 +5288,7 @@
         </p:nvSpPr>
         <p:spPr>
           <a:xfrm>
-            <a:off x="4719218" y="3337560"/>
+            <a:off x="4719218" y="3350514"/>
             <a:ext cx="731520" cy="731520"/>
           </a:xfrm>
           <a:prstGeom prst="rect">
@@ -4770,8 +5327,8 @@
         </p:nvSpPr>
         <p:spPr>
           <a:xfrm>
-            <a:off x="4719218" y="4251960"/>
-            <a:ext cx="2753258" cy="1645920"/>
+            <a:off x="4719218" y="4264914"/>
+            <a:ext cx="2753258" cy="1620012"/>
           </a:xfrm>
           <a:prstGeom prst="rect">
             <a:avLst/>
@@ -4809,12 +5366,12 @@
         </p:nvSpPr>
         <p:spPr>
           <a:xfrm>
-            <a:off x="8112557" y="2971800"/>
-            <a:ext cx="3393338" cy="3108960"/>
+            <a:off x="8112557" y="2984754"/>
+            <a:ext cx="3393338" cy="3083052"/>
           </a:xfrm>
           <a:prstGeom prst="roundRect">
             <a:avLst>
-              <a:gd name="adj" fmla="val 4118"/>
+              <a:gd name="adj" fmla="val 4152"/>
             </a:avLst>
           </a:prstGeom>
           <a:solidFill>
@@ -4843,7 +5400,7 @@
         </p:nvSpPr>
         <p:spPr>
           <a:xfrm>
-            <a:off x="8240573" y="2971800"/>
+            <a:off x="8240573" y="2984754"/>
             <a:ext cx="3137306" cy="91440"/>
           </a:xfrm>
           <a:prstGeom prst="rect">
@@ -4868,7 +5425,7 @@
         </p:nvSpPr>
         <p:spPr>
           <a:xfrm>
-            <a:off x="8432597" y="3337560"/>
+            <a:off x="8432597" y="3350514"/>
             <a:ext cx="731520" cy="731520"/>
           </a:xfrm>
           <a:prstGeom prst="ellipse">
@@ -4893,7 +5450,7 @@
         </p:nvSpPr>
         <p:spPr>
           <a:xfrm>
-            <a:off x="8432597" y="3337560"/>
+            <a:off x="8432597" y="3350514"/>
             <a:ext cx="731520" cy="731520"/>
           </a:xfrm>
           <a:prstGeom prst="rect">
@@ -4932,8 +5489,8 @@
         </p:nvSpPr>
         <p:spPr>
           <a:xfrm>
-            <a:off x="8432597" y="4251960"/>
-            <a:ext cx="2753258" cy="1645920"/>
+            <a:off x="8432597" y="4264914"/>
+            <a:ext cx="2753258" cy="1620012"/>
           </a:xfrm>
           <a:prstGeom prst="rect">
             <a:avLst/>
@@ -5108,7 +5665,7 @@
                 <a:ea typeface="Georgia" pitchFamily="34" charset="-122"/>
                 <a:cs typeface="Georgia" pitchFamily="34" charset="-120"/>
               </a:rPr>
-              <a:t>Share your class’s join link</a:t>
+              <a:t>Share your class’s join link</a:t>
             </a:r>
             <a:endParaRPr lang="en-US" sz="3600" dirty="0"/>
           </a:p>
@@ -5286,7 +5843,7 @@
         <p:spPr>
           <a:xfrm>
             <a:off x="1417320" y="1965960"/>
-            <a:ext cx="4449928" cy="822960"/>
+            <a:ext cx="4449928" cy="685800"/>
           </a:xfrm>
           <a:prstGeom prst="rect">
             <a:avLst/>
@@ -5414,7 +5971,7 @@
         <p:spPr>
           <a:xfrm>
             <a:off x="7055968" y="1965960"/>
-            <a:ext cx="4449928" cy="822960"/>
+            <a:ext cx="4449928" cy="685800"/>
           </a:xfrm>
           <a:prstGeom prst="rect">
             <a:avLst/>
@@ -5477,7 +6034,7 @@
         </p:nvSpPr>
         <p:spPr>
           <a:xfrm>
-            <a:off x="685800" y="2944368"/>
+            <a:off x="685800" y="2807208"/>
             <a:ext cx="548640" cy="548640"/>
           </a:xfrm>
           <a:prstGeom prst="ellipse">
@@ -5502,7 +6059,7 @@
         </p:nvSpPr>
         <p:spPr>
           <a:xfrm>
-            <a:off x="685800" y="2944368"/>
+            <a:off x="685800" y="2807208"/>
             <a:ext cx="548640" cy="548640"/>
           </a:xfrm>
           <a:prstGeom prst="rect">
@@ -5541,8 +6098,8 @@
         </p:nvSpPr>
         <p:spPr>
           <a:xfrm>
-            <a:off x="1417320" y="2834640"/>
-            <a:ext cx="4449928" cy="822960"/>
+            <a:off x="1417320" y="2697480"/>
+            <a:ext cx="4449928" cy="685800"/>
           </a:xfrm>
           <a:prstGeom prst="rect">
             <a:avLst/>
@@ -5580,7 +6137,7 @@
         </p:nvSpPr>
         <p:spPr>
           <a:xfrm>
-            <a:off x="6324448" y="2944368"/>
+            <a:off x="6324448" y="2807208"/>
             <a:ext cx="548640" cy="548640"/>
           </a:xfrm>
           <a:prstGeom prst="ellipse">
@@ -5605,7 +6162,7 @@
         </p:nvSpPr>
         <p:spPr>
           <a:xfrm>
-            <a:off x="6324448" y="2944368"/>
+            <a:off x="6324448" y="2807208"/>
             <a:ext cx="548640" cy="548640"/>
           </a:xfrm>
           <a:prstGeom prst="rect">
@@ -5644,8 +6201,8 @@
         </p:nvSpPr>
         <p:spPr>
           <a:xfrm>
-            <a:off x="7055968" y="2834640"/>
-            <a:ext cx="4449928" cy="822960"/>
+            <a:off x="7055968" y="2697480"/>
+            <a:ext cx="4449928" cy="685800"/>
           </a:xfrm>
           <a:prstGeom prst="rect">
             <a:avLst/>
@@ -5708,12 +6265,12 @@
         </p:nvSpPr>
         <p:spPr>
           <a:xfrm>
-            <a:off x="2063915" y="3931920"/>
-            <a:ext cx="8063865" cy="2148840"/>
+            <a:off x="1120940" y="3611880"/>
+            <a:ext cx="9949815" cy="2606040"/>
           </a:xfrm>
           <a:prstGeom prst="roundRect">
             <a:avLst>
-              <a:gd name="adj" fmla="val 5957"/>
+              <a:gd name="adj" fmla="val 4912"/>
             </a:avLst>
           </a:prstGeom>
           <a:solidFill>
@@ -5750,8 +6307,8 @@
         </p:blipFill>
         <p:spPr>
           <a:xfrm>
-            <a:off x="2191931" y="4059936"/>
-            <a:ext cx="7807833" cy="1892808"/>
+            <a:off x="1248956" y="3739896"/>
+            <a:ext cx="9693783" cy="2350008"/>
           </a:xfrm>
           <a:prstGeom prst="rect">
             <a:avLst/>
@@ -5839,7 +6396,7 @@
         </p:nvSpPr>
         <p:spPr>
           <a:xfrm>
-            <a:off x="685800" y="502920"/>
+            <a:off x="685800" y="274320"/>
             <a:ext cx="9357055" cy="320040"/>
           </a:xfrm>
           <a:prstGeom prst="rect">
@@ -5878,8 +6435,8 @@
         </p:nvSpPr>
         <p:spPr>
           <a:xfrm>
-            <a:off x="685800" y="868680"/>
-            <a:ext cx="9357055" cy="960120"/>
+            <a:off x="685800" y="621792"/>
+            <a:ext cx="9357055" cy="640080"/>
           </a:xfrm>
           <a:prstGeom prst="rect">
             <a:avLst/>
@@ -5895,7 +6452,7 @@
               <a:buNone/>
             </a:pPr>
             <a:r>
-              <a:rPr lang="en-US" sz="3600" dirty="0">
+              <a:rPr lang="en-US" sz="3200" dirty="0">
                 <a:solidFill>
                   <a:srgbClr val="3C3828"/>
                 </a:solidFill>
@@ -5903,9 +6460,9 @@
                 <a:ea typeface="Georgia" pitchFamily="34" charset="-122"/>
                 <a:cs typeface="Georgia" pitchFamily="34" charset="-120"/>
               </a:rPr>
-              <a:t>Create your student account</a:t>
-            </a:r>
-            <a:endParaRPr lang="en-US" sz="3600" dirty="0"/>
+              <a:t>Create your student account</a:t>
+            </a:r>
+            <a:endParaRPr lang="en-US" sz="3200" dirty="0"/>
           </a:p>
         </p:txBody>
       </p:sp>
@@ -5917,12 +6474,12 @@
         </p:nvSpPr>
         <p:spPr>
           <a:xfrm>
-            <a:off x="685800" y="1828800"/>
-            <a:ext cx="1786999" cy="4343400"/>
+            <a:off x="685800" y="1417320"/>
+            <a:ext cx="1975104" cy="4800600"/>
           </a:xfrm>
           <a:prstGeom prst="roundRect">
             <a:avLst>
-              <a:gd name="adj" fmla="val 7164"/>
+              <a:gd name="adj" fmla="val 6481"/>
             </a:avLst>
           </a:prstGeom>
           <a:solidFill>
@@ -5959,8 +6516,8 @@
         </p:blipFill>
         <p:spPr>
           <a:xfrm>
-            <a:off x="813816" y="1956816"/>
-            <a:ext cx="1530967" cy="4087368"/>
+            <a:off x="813816" y="1545336"/>
+            <a:ext cx="1719072" cy="4544568"/>
           </a:xfrm>
           <a:prstGeom prst="rect">
             <a:avLst/>
@@ -5975,8 +6532,8 @@
         </p:nvSpPr>
         <p:spPr>
           <a:xfrm>
-            <a:off x="3021439" y="2505456"/>
-            <a:ext cx="292608" cy="292608"/>
+            <a:off x="2132381" y="2839166"/>
+            <a:ext cx="457200" cy="457200"/>
           </a:xfrm>
           <a:prstGeom prst="ellipse">
             <a:avLst/>
@@ -5984,12 +6541,19 @@
           <a:solidFill>
             <a:srgbClr val="FFB600"/>
           </a:solidFill>
-          <a:ln w="12700">
-            <a:solidFill>
-              <a:srgbClr val="FFB600"/>
-            </a:solidFill>
-            <a:prstDash val="solid"/>
-          </a:ln>
+          <a:ln w="25400">
+            <a:solidFill>
+              <a:srgbClr val="FFFEFA"/>
+            </a:solidFill>
+            <a:prstDash val="solid"/>
+          </a:ln>
+          <a:effectLst>
+            <a:outerShdw sx="100000" sy="100000" kx="0" ky="0" algn="bl" rotWithShape="0" blurRad="50800" dist="19050" dir="5400000">
+              <a:srgbClr val="3C3828">
+                <a:alpha val="25000"/>
+              </a:srgbClr>
+            </a:outerShdw>
+          </a:effectLst>
         </p:spPr>
       </p:sp>
       <p:sp>
@@ -6000,8 +6564,331 @@
         </p:nvSpPr>
         <p:spPr>
           <a:xfrm>
-            <a:off x="3496927" y="2194560"/>
-            <a:ext cx="8008968" cy="914400"/>
+            <a:off x="2132381" y="2839166"/>
+            <a:ext cx="457200" cy="457200"/>
+          </a:xfrm>
+          <a:prstGeom prst="rect">
+            <a:avLst/>
+          </a:prstGeom>
+          <a:noFill/>
+          <a:ln/>
+        </p:spPr>
+        <p:txBody>
+          <a:bodyPr wrap="square" lIns="0" tIns="0" rIns="0" bIns="0" rtlCol="0" anchor="ctr"/>
+          <a:lstStyle/>
+          <a:p>
+            <a:pPr algn="ctr" indent="0" marL="0">
+              <a:buNone/>
+            </a:pPr>
+            <a:r>
+              <a:rPr lang="en-US" sz="1800" b="1" dirty="0">
+                <a:solidFill>
+                  <a:srgbClr val="FFFEFA"/>
+                </a:solidFill>
+                <a:latin typeface="Georgia" pitchFamily="34" charset="0"/>
+                <a:ea typeface="Georgia" pitchFamily="34" charset="-122"/>
+                <a:cs typeface="Georgia" pitchFamily="34" charset="-120"/>
+              </a:rPr>
+              <a:t>1</a:t>
+            </a:r>
+            <a:endParaRPr lang="en-US" sz="1800" dirty="0"/>
+          </a:p>
+        </p:txBody>
+      </p:sp>
+      <p:sp>
+        <p:nvSpPr>
+          <p:cNvPr id="8" name="Shape 5"/>
+          <p:cNvSpPr/>
+          <p:nvPr/>
+        </p:nvSpPr>
+        <p:spPr>
+          <a:xfrm>
+            <a:off x="2080809" y="3748080"/>
+            <a:ext cx="457200" cy="457200"/>
+          </a:xfrm>
+          <a:prstGeom prst="ellipse">
+            <a:avLst/>
+          </a:prstGeom>
+          <a:solidFill>
+            <a:srgbClr val="FC4540"/>
+          </a:solidFill>
+          <a:ln w="25400">
+            <a:solidFill>
+              <a:srgbClr val="FFFEFA"/>
+            </a:solidFill>
+            <a:prstDash val="solid"/>
+          </a:ln>
+          <a:effectLst>
+            <a:outerShdw sx="100000" sy="100000" kx="0" ky="0" algn="bl" rotWithShape="0" blurRad="50800" dist="19050" dir="5400000">
+              <a:srgbClr val="3C3828">
+                <a:alpha val="25000"/>
+              </a:srgbClr>
+            </a:outerShdw>
+          </a:effectLst>
+        </p:spPr>
+      </p:sp>
+      <p:sp>
+        <p:nvSpPr>
+          <p:cNvPr id="9" name="Text 6"/>
+          <p:cNvSpPr/>
+          <p:nvPr/>
+        </p:nvSpPr>
+        <p:spPr>
+          <a:xfrm>
+            <a:off x="2080809" y="3748080"/>
+            <a:ext cx="457200" cy="457200"/>
+          </a:xfrm>
+          <a:prstGeom prst="rect">
+            <a:avLst/>
+          </a:prstGeom>
+          <a:noFill/>
+          <a:ln/>
+        </p:spPr>
+        <p:txBody>
+          <a:bodyPr wrap="square" lIns="0" tIns="0" rIns="0" bIns="0" rtlCol="0" anchor="ctr"/>
+          <a:lstStyle/>
+          <a:p>
+            <a:pPr algn="ctr" indent="0" marL="0">
+              <a:buNone/>
+            </a:pPr>
+            <a:r>
+              <a:rPr lang="en-US" sz="1800" b="1" dirty="0">
+                <a:solidFill>
+                  <a:srgbClr val="FFFEFA"/>
+                </a:solidFill>
+                <a:latin typeface="Georgia" pitchFamily="34" charset="0"/>
+                <a:ea typeface="Georgia" pitchFamily="34" charset="-122"/>
+                <a:cs typeface="Georgia" pitchFamily="34" charset="-120"/>
+              </a:rPr>
+              <a:t>2</a:t>
+            </a:r>
+            <a:endParaRPr lang="en-US" sz="1800" dirty="0"/>
+          </a:p>
+        </p:txBody>
+      </p:sp>
+      <p:sp>
+        <p:nvSpPr>
+          <p:cNvPr id="10" name="Shape 7"/>
+          <p:cNvSpPr/>
+          <p:nvPr/>
+        </p:nvSpPr>
+        <p:spPr>
+          <a:xfrm>
+            <a:off x="2080809" y="4179814"/>
+            <a:ext cx="457200" cy="457200"/>
+          </a:xfrm>
+          <a:prstGeom prst="ellipse">
+            <a:avLst/>
+          </a:prstGeom>
+          <a:solidFill>
+            <a:srgbClr val="FF9755"/>
+          </a:solidFill>
+          <a:ln w="25400">
+            <a:solidFill>
+              <a:srgbClr val="FFFEFA"/>
+            </a:solidFill>
+            <a:prstDash val="solid"/>
+          </a:ln>
+          <a:effectLst>
+            <a:outerShdw sx="100000" sy="100000" kx="0" ky="0" algn="bl" rotWithShape="0" blurRad="50800" dist="19050" dir="5400000">
+              <a:srgbClr val="3C3828">
+                <a:alpha val="25000"/>
+              </a:srgbClr>
+            </a:outerShdw>
+          </a:effectLst>
+        </p:spPr>
+      </p:sp>
+      <p:sp>
+        <p:nvSpPr>
+          <p:cNvPr id="11" name="Text 8"/>
+          <p:cNvSpPr/>
+          <p:nvPr/>
+        </p:nvSpPr>
+        <p:spPr>
+          <a:xfrm>
+            <a:off x="2080809" y="4179814"/>
+            <a:ext cx="457200" cy="457200"/>
+          </a:xfrm>
+          <a:prstGeom prst="rect">
+            <a:avLst/>
+          </a:prstGeom>
+          <a:noFill/>
+          <a:ln/>
+        </p:spPr>
+        <p:txBody>
+          <a:bodyPr wrap="square" lIns="0" tIns="0" rIns="0" bIns="0" rtlCol="0" anchor="ctr"/>
+          <a:lstStyle/>
+          <a:p>
+            <a:pPr algn="ctr" indent="0" marL="0">
+              <a:buNone/>
+            </a:pPr>
+            <a:r>
+              <a:rPr lang="en-US" sz="1800" b="1" dirty="0">
+                <a:solidFill>
+                  <a:srgbClr val="FFFEFA"/>
+                </a:solidFill>
+                <a:latin typeface="Georgia" pitchFamily="34" charset="0"/>
+                <a:ea typeface="Georgia" pitchFamily="34" charset="-122"/>
+                <a:cs typeface="Georgia" pitchFamily="34" charset="-120"/>
+              </a:rPr>
+              <a:t>3</a:t>
+            </a:r>
+            <a:endParaRPr lang="en-US" sz="1800" dirty="0"/>
+          </a:p>
+        </p:txBody>
+      </p:sp>
+      <p:sp>
+        <p:nvSpPr>
+          <p:cNvPr id="12" name="Shape 9"/>
+          <p:cNvSpPr/>
+          <p:nvPr/>
+        </p:nvSpPr>
+        <p:spPr>
+          <a:xfrm>
+            <a:off x="2080809" y="5588630"/>
+            <a:ext cx="457200" cy="457200"/>
+          </a:xfrm>
+          <a:prstGeom prst="ellipse">
+            <a:avLst/>
+          </a:prstGeom>
+          <a:solidFill>
+            <a:srgbClr val="FC4067"/>
+          </a:solidFill>
+          <a:ln w="25400">
+            <a:solidFill>
+              <a:srgbClr val="FFFEFA"/>
+            </a:solidFill>
+            <a:prstDash val="solid"/>
+          </a:ln>
+          <a:effectLst>
+            <a:outerShdw sx="100000" sy="100000" kx="0" ky="0" algn="bl" rotWithShape="0" blurRad="50800" dist="19050" dir="5400000">
+              <a:srgbClr val="3C3828">
+                <a:alpha val="25000"/>
+              </a:srgbClr>
+            </a:outerShdw>
+          </a:effectLst>
+        </p:spPr>
+      </p:sp>
+      <p:sp>
+        <p:nvSpPr>
+          <p:cNvPr id="13" name="Text 10"/>
+          <p:cNvSpPr/>
+          <p:nvPr/>
+        </p:nvSpPr>
+        <p:spPr>
+          <a:xfrm>
+            <a:off x="2080809" y="5588630"/>
+            <a:ext cx="457200" cy="457200"/>
+          </a:xfrm>
+          <a:prstGeom prst="rect">
+            <a:avLst/>
+          </a:prstGeom>
+          <a:noFill/>
+          <a:ln/>
+        </p:spPr>
+        <p:txBody>
+          <a:bodyPr wrap="square" lIns="0" tIns="0" rIns="0" bIns="0" rtlCol="0" anchor="ctr"/>
+          <a:lstStyle/>
+          <a:p>
+            <a:pPr algn="ctr" indent="0" marL="0">
+              <a:buNone/>
+            </a:pPr>
+            <a:r>
+              <a:rPr lang="en-US" sz="1800" b="1" dirty="0">
+                <a:solidFill>
+                  <a:srgbClr val="FFFEFA"/>
+                </a:solidFill>
+                <a:latin typeface="Georgia" pitchFamily="34" charset="0"/>
+                <a:ea typeface="Georgia" pitchFamily="34" charset="-122"/>
+                <a:cs typeface="Georgia" pitchFamily="34" charset="-120"/>
+              </a:rPr>
+              <a:t>4</a:t>
+            </a:r>
+            <a:endParaRPr lang="en-US" sz="1800" dirty="0"/>
+          </a:p>
+        </p:txBody>
+      </p:sp>
+      <p:sp>
+        <p:nvSpPr>
+          <p:cNvPr id="14" name="Shape 11"/>
+          <p:cNvSpPr/>
+          <p:nvPr/>
+        </p:nvSpPr>
+        <p:spPr>
+          <a:xfrm>
+            <a:off x="3118104" y="2491740"/>
+            <a:ext cx="457200" cy="457200"/>
+          </a:xfrm>
+          <a:prstGeom prst="ellipse">
+            <a:avLst/>
+          </a:prstGeom>
+          <a:solidFill>
+            <a:srgbClr val="FFB600"/>
+          </a:solidFill>
+          <a:ln w="25400">
+            <a:solidFill>
+              <a:srgbClr val="FFFEFA"/>
+            </a:solidFill>
+            <a:prstDash val="solid"/>
+          </a:ln>
+          <a:effectLst>
+            <a:outerShdw sx="100000" sy="100000" kx="0" ky="0" algn="bl" rotWithShape="0" blurRad="50800" dist="19050" dir="5400000">
+              <a:srgbClr val="3C3828">
+                <a:alpha val="25000"/>
+              </a:srgbClr>
+            </a:outerShdw>
+          </a:effectLst>
+        </p:spPr>
+      </p:sp>
+      <p:sp>
+        <p:nvSpPr>
+          <p:cNvPr id="15" name="Text 12"/>
+          <p:cNvSpPr/>
+          <p:nvPr/>
+        </p:nvSpPr>
+        <p:spPr>
+          <a:xfrm>
+            <a:off x="3118104" y="2491740"/>
+            <a:ext cx="457200" cy="457200"/>
+          </a:xfrm>
+          <a:prstGeom prst="rect">
+            <a:avLst/>
+          </a:prstGeom>
+          <a:noFill/>
+          <a:ln/>
+        </p:spPr>
+        <p:txBody>
+          <a:bodyPr wrap="square" lIns="0" tIns="0" rIns="0" bIns="0" rtlCol="0" anchor="ctr"/>
+          <a:lstStyle/>
+          <a:p>
+            <a:pPr algn="ctr" indent="0" marL="0">
+              <a:buNone/>
+            </a:pPr>
+            <a:r>
+              <a:rPr lang="en-US" sz="1800" b="1" dirty="0">
+                <a:solidFill>
+                  <a:srgbClr val="FFFEFA"/>
+                </a:solidFill>
+                <a:latin typeface="Georgia" pitchFamily="34" charset="0"/>
+                <a:ea typeface="Georgia" pitchFamily="34" charset="-122"/>
+                <a:cs typeface="Georgia" pitchFamily="34" charset="-120"/>
+              </a:rPr>
+              <a:t>1</a:t>
+            </a:r>
+            <a:endParaRPr lang="en-US" sz="1800" dirty="0"/>
+          </a:p>
+        </p:txBody>
+      </p:sp>
+      <p:sp>
+        <p:nvSpPr>
+          <p:cNvPr id="16" name="Text 13"/>
+          <p:cNvSpPr/>
+          <p:nvPr/>
+        </p:nvSpPr>
+        <p:spPr>
+          <a:xfrm>
+            <a:off x="3758184" y="2354580"/>
+            <a:ext cx="7747711" cy="731520"/>
           </a:xfrm>
           <a:prstGeom prst="rect">
             <a:avLst/>
@@ -6033,14 +6920,14 @@
       </p:sp>
       <p:sp>
         <p:nvSpPr>
-          <p:cNvPr id="8" name="Shape 5"/>
-          <p:cNvSpPr/>
-          <p:nvPr/>
-        </p:nvSpPr>
-        <p:spPr>
-          <a:xfrm>
-            <a:off x="3021439" y="3419856"/>
-            <a:ext cx="292608" cy="292608"/>
+          <p:cNvPr id="17" name="Shape 14"/>
+          <p:cNvSpPr/>
+          <p:nvPr/>
+        </p:nvSpPr>
+        <p:spPr>
+          <a:xfrm>
+            <a:off x="3118104" y="3223260"/>
+            <a:ext cx="457200" cy="457200"/>
           </a:xfrm>
           <a:prstGeom prst="ellipse">
             <a:avLst/>
@@ -6048,24 +6935,70 @@
           <a:solidFill>
             <a:srgbClr val="FC4540"/>
           </a:solidFill>
-          <a:ln w="12700">
-            <a:solidFill>
-              <a:srgbClr val="FC4540"/>
-            </a:solidFill>
-            <a:prstDash val="solid"/>
-          </a:ln>
-        </p:spPr>
-      </p:sp>
-      <p:sp>
-        <p:nvSpPr>
-          <p:cNvPr id="9" name="Text 6"/>
-          <p:cNvSpPr/>
-          <p:nvPr/>
-        </p:nvSpPr>
-        <p:spPr>
-          <a:xfrm>
-            <a:off x="3496927" y="3108960"/>
-            <a:ext cx="8008968" cy="914400"/>
+          <a:ln w="25400">
+            <a:solidFill>
+              <a:srgbClr val="FFFEFA"/>
+            </a:solidFill>
+            <a:prstDash val="solid"/>
+          </a:ln>
+          <a:effectLst>
+            <a:outerShdw sx="100000" sy="100000" kx="0" ky="0" algn="bl" rotWithShape="0" blurRad="50800" dist="19050" dir="5400000">
+              <a:srgbClr val="3C3828">
+                <a:alpha val="25000"/>
+              </a:srgbClr>
+            </a:outerShdw>
+          </a:effectLst>
+        </p:spPr>
+      </p:sp>
+      <p:sp>
+        <p:nvSpPr>
+          <p:cNvPr id="18" name="Text 15"/>
+          <p:cNvSpPr/>
+          <p:nvPr/>
+        </p:nvSpPr>
+        <p:spPr>
+          <a:xfrm>
+            <a:off x="3118104" y="3223260"/>
+            <a:ext cx="457200" cy="457200"/>
+          </a:xfrm>
+          <a:prstGeom prst="rect">
+            <a:avLst/>
+          </a:prstGeom>
+          <a:noFill/>
+          <a:ln/>
+        </p:spPr>
+        <p:txBody>
+          <a:bodyPr wrap="square" lIns="0" tIns="0" rIns="0" bIns="0" rtlCol="0" anchor="ctr"/>
+          <a:lstStyle/>
+          <a:p>
+            <a:pPr algn="ctr" indent="0" marL="0">
+              <a:buNone/>
+            </a:pPr>
+            <a:r>
+              <a:rPr lang="en-US" sz="1800" b="1" dirty="0">
+                <a:solidFill>
+                  <a:srgbClr val="FFFEFA"/>
+                </a:solidFill>
+                <a:latin typeface="Georgia" pitchFamily="34" charset="0"/>
+                <a:ea typeface="Georgia" pitchFamily="34" charset="-122"/>
+                <a:cs typeface="Georgia" pitchFamily="34" charset="-120"/>
+              </a:rPr>
+              <a:t>2</a:t>
+            </a:r>
+            <a:endParaRPr lang="en-US" sz="1800" dirty="0"/>
+          </a:p>
+        </p:txBody>
+      </p:sp>
+      <p:sp>
+        <p:nvSpPr>
+          <p:cNvPr id="19" name="Text 16"/>
+          <p:cNvSpPr/>
+          <p:nvPr/>
+        </p:nvSpPr>
+        <p:spPr>
+          <a:xfrm>
+            <a:off x="3758184" y="3086100"/>
+            <a:ext cx="7747711" cy="731520"/>
           </a:xfrm>
           <a:prstGeom prst="rect">
             <a:avLst/>
@@ -6122,14 +7055,14 @@
       </p:sp>
       <p:sp>
         <p:nvSpPr>
-          <p:cNvPr id="10" name="Shape 7"/>
-          <p:cNvSpPr/>
-          <p:nvPr/>
-        </p:nvSpPr>
-        <p:spPr>
-          <a:xfrm>
-            <a:off x="3021439" y="4334256"/>
-            <a:ext cx="292608" cy="292608"/>
+          <p:cNvPr id="20" name="Shape 17"/>
+          <p:cNvSpPr/>
+          <p:nvPr/>
+        </p:nvSpPr>
+        <p:spPr>
+          <a:xfrm>
+            <a:off x="3118104" y="3954780"/>
+            <a:ext cx="457200" cy="457200"/>
           </a:xfrm>
           <a:prstGeom prst="ellipse">
             <a:avLst/>
@@ -6137,24 +7070,70 @@
           <a:solidFill>
             <a:srgbClr val="FF9755"/>
           </a:solidFill>
-          <a:ln w="12700">
-            <a:solidFill>
-              <a:srgbClr val="FF9755"/>
-            </a:solidFill>
-            <a:prstDash val="solid"/>
-          </a:ln>
-        </p:spPr>
-      </p:sp>
-      <p:sp>
-        <p:nvSpPr>
-          <p:cNvPr id="11" name="Text 8"/>
-          <p:cNvSpPr/>
-          <p:nvPr/>
-        </p:nvSpPr>
-        <p:spPr>
-          <a:xfrm>
-            <a:off x="3496927" y="4023360"/>
-            <a:ext cx="8008968" cy="914400"/>
+          <a:ln w="25400">
+            <a:solidFill>
+              <a:srgbClr val="FFFEFA"/>
+            </a:solidFill>
+            <a:prstDash val="solid"/>
+          </a:ln>
+          <a:effectLst>
+            <a:outerShdw sx="100000" sy="100000" kx="0" ky="0" algn="bl" rotWithShape="0" blurRad="50800" dist="19050" dir="5400000">
+              <a:srgbClr val="3C3828">
+                <a:alpha val="25000"/>
+              </a:srgbClr>
+            </a:outerShdw>
+          </a:effectLst>
+        </p:spPr>
+      </p:sp>
+      <p:sp>
+        <p:nvSpPr>
+          <p:cNvPr id="21" name="Text 18"/>
+          <p:cNvSpPr/>
+          <p:nvPr/>
+        </p:nvSpPr>
+        <p:spPr>
+          <a:xfrm>
+            <a:off x="3118104" y="3954780"/>
+            <a:ext cx="457200" cy="457200"/>
+          </a:xfrm>
+          <a:prstGeom prst="rect">
+            <a:avLst/>
+          </a:prstGeom>
+          <a:noFill/>
+          <a:ln/>
+        </p:spPr>
+        <p:txBody>
+          <a:bodyPr wrap="square" lIns="0" tIns="0" rIns="0" bIns="0" rtlCol="0" anchor="ctr"/>
+          <a:lstStyle/>
+          <a:p>
+            <a:pPr algn="ctr" indent="0" marL="0">
+              <a:buNone/>
+            </a:pPr>
+            <a:r>
+              <a:rPr lang="en-US" sz="1800" b="1" dirty="0">
+                <a:solidFill>
+                  <a:srgbClr val="FFFEFA"/>
+                </a:solidFill>
+                <a:latin typeface="Georgia" pitchFamily="34" charset="0"/>
+                <a:ea typeface="Georgia" pitchFamily="34" charset="-122"/>
+                <a:cs typeface="Georgia" pitchFamily="34" charset="-120"/>
+              </a:rPr>
+              <a:t>3</a:t>
+            </a:r>
+            <a:endParaRPr lang="en-US" sz="1800" dirty="0"/>
+          </a:p>
+        </p:txBody>
+      </p:sp>
+      <p:sp>
+        <p:nvSpPr>
+          <p:cNvPr id="22" name="Text 19"/>
+          <p:cNvSpPr/>
+          <p:nvPr/>
+        </p:nvSpPr>
+        <p:spPr>
+          <a:xfrm>
+            <a:off x="3758184" y="3817620"/>
+            <a:ext cx="7747711" cy="731520"/>
           </a:xfrm>
           <a:prstGeom prst="rect">
             <a:avLst/>
@@ -6211,14 +7190,14 @@
       </p:sp>
       <p:sp>
         <p:nvSpPr>
-          <p:cNvPr id="12" name="Shape 9"/>
-          <p:cNvSpPr/>
-          <p:nvPr/>
-        </p:nvSpPr>
-        <p:spPr>
-          <a:xfrm>
-            <a:off x="3021439" y="5248656"/>
-            <a:ext cx="292608" cy="292608"/>
+          <p:cNvPr id="23" name="Shape 20"/>
+          <p:cNvSpPr/>
+          <p:nvPr/>
+        </p:nvSpPr>
+        <p:spPr>
+          <a:xfrm>
+            <a:off x="3118104" y="4686300"/>
+            <a:ext cx="457200" cy="457200"/>
           </a:xfrm>
           <a:prstGeom prst="ellipse">
             <a:avLst/>
@@ -6226,24 +7205,70 @@
           <a:solidFill>
             <a:srgbClr val="FC4067"/>
           </a:solidFill>
-          <a:ln w="12700">
-            <a:solidFill>
-              <a:srgbClr val="FC4067"/>
-            </a:solidFill>
-            <a:prstDash val="solid"/>
-          </a:ln>
-        </p:spPr>
-      </p:sp>
-      <p:sp>
-        <p:nvSpPr>
-          <p:cNvPr id="13" name="Text 10"/>
-          <p:cNvSpPr/>
-          <p:nvPr/>
-        </p:nvSpPr>
-        <p:spPr>
-          <a:xfrm>
-            <a:off x="3496927" y="4937760"/>
-            <a:ext cx="8008968" cy="914400"/>
+          <a:ln w="25400">
+            <a:solidFill>
+              <a:srgbClr val="FFFEFA"/>
+            </a:solidFill>
+            <a:prstDash val="solid"/>
+          </a:ln>
+          <a:effectLst>
+            <a:outerShdw sx="100000" sy="100000" kx="0" ky="0" algn="bl" rotWithShape="0" blurRad="50800" dist="19050" dir="5400000">
+              <a:srgbClr val="3C3828">
+                <a:alpha val="25000"/>
+              </a:srgbClr>
+            </a:outerShdw>
+          </a:effectLst>
+        </p:spPr>
+      </p:sp>
+      <p:sp>
+        <p:nvSpPr>
+          <p:cNvPr id="24" name="Text 21"/>
+          <p:cNvSpPr/>
+          <p:nvPr/>
+        </p:nvSpPr>
+        <p:spPr>
+          <a:xfrm>
+            <a:off x="3118104" y="4686300"/>
+            <a:ext cx="457200" cy="457200"/>
+          </a:xfrm>
+          <a:prstGeom prst="rect">
+            <a:avLst/>
+          </a:prstGeom>
+          <a:noFill/>
+          <a:ln/>
+        </p:spPr>
+        <p:txBody>
+          <a:bodyPr wrap="square" lIns="0" tIns="0" rIns="0" bIns="0" rtlCol="0" anchor="ctr"/>
+          <a:lstStyle/>
+          <a:p>
+            <a:pPr algn="ctr" indent="0" marL="0">
+              <a:buNone/>
+            </a:pPr>
+            <a:r>
+              <a:rPr lang="en-US" sz="1800" b="1" dirty="0">
+                <a:solidFill>
+                  <a:srgbClr val="FFFEFA"/>
+                </a:solidFill>
+                <a:latin typeface="Georgia" pitchFamily="34" charset="0"/>
+                <a:ea typeface="Georgia" pitchFamily="34" charset="-122"/>
+                <a:cs typeface="Georgia" pitchFamily="34" charset="-120"/>
+              </a:rPr>
+              <a:t>4</a:t>
+            </a:r>
+            <a:endParaRPr lang="en-US" sz="1800" dirty="0"/>
+          </a:p>
+        </p:txBody>
+      </p:sp>
+      <p:sp>
+        <p:nvSpPr>
+          <p:cNvPr id="25" name="Text 22"/>
+          <p:cNvSpPr/>
+          <p:nvPr/>
+        </p:nvSpPr>
+        <p:spPr>
+          <a:xfrm>
+            <a:off x="3758184" y="4549140"/>
+            <a:ext cx="7747711" cy="731520"/>
           </a:xfrm>
           <a:prstGeom prst="rect">
             <a:avLst/>
@@ -6368,7 +7393,7 @@
         </p:nvSpPr>
         <p:spPr>
           <a:xfrm>
-            <a:off x="685800" y="502920"/>
+            <a:off x="685800" y="274320"/>
             <a:ext cx="9357055" cy="320040"/>
           </a:xfrm>
           <a:prstGeom prst="rect">
@@ -6407,8 +7432,8 @@
         </p:nvSpPr>
         <p:spPr>
           <a:xfrm>
-            <a:off x="685800" y="868680"/>
-            <a:ext cx="9357055" cy="960120"/>
+            <a:off x="685800" y="621792"/>
+            <a:ext cx="9357055" cy="640080"/>
           </a:xfrm>
           <a:prstGeom prst="rect">
             <a:avLst/>
@@ -6424,7 +7449,7 @@
               <a:buNone/>
             </a:pPr>
             <a:r>
-              <a:rPr lang="en-US" sz="3600" dirty="0">
+              <a:rPr lang="en-US" sz="3200" dirty="0">
                 <a:solidFill>
                   <a:srgbClr val="3C3828"/>
                 </a:solidFill>
@@ -6434,7 +7459,7 @@
               </a:rPr>
               <a:t>Your YAWP! dashboard</a:t>
             </a:r>
-            <a:endParaRPr lang="en-US" sz="3600" dirty="0"/>
+            <a:endParaRPr lang="en-US" sz="3200" dirty="0"/>
           </a:p>
         </p:txBody>
       </p:sp>
@@ -6446,12 +7471,12 @@
         </p:nvSpPr>
         <p:spPr>
           <a:xfrm>
-            <a:off x="685800" y="1828800"/>
-            <a:ext cx="6949440" cy="4283901"/>
+            <a:off x="685800" y="1525451"/>
+            <a:ext cx="7436815" cy="4584338"/>
           </a:xfrm>
           <a:prstGeom prst="roundRect">
             <a:avLst>
-              <a:gd name="adj" fmla="val 2988"/>
+              <a:gd name="adj" fmla="val 2792"/>
             </a:avLst>
           </a:prstGeom>
           <a:solidFill>
@@ -6488,8 +7513,8 @@
         </p:blipFill>
         <p:spPr>
           <a:xfrm>
-            <a:off x="813816" y="1956816"/>
-            <a:ext cx="6693408" cy="4027869"/>
+            <a:off x="813816" y="1653467"/>
+            <a:ext cx="7180783" cy="4328306"/>
           </a:xfrm>
           <a:prstGeom prst="rect">
             <a:avLst/>
@@ -6504,7 +7529,7 @@
         </p:nvSpPr>
         <p:spPr>
           <a:xfrm>
-            <a:off x="8183880" y="2505456"/>
+            <a:off x="8579815" y="2330196"/>
             <a:ext cx="292608" cy="292608"/>
           </a:xfrm>
           <a:prstGeom prst="ellipse">
@@ -6529,8 +7554,8 @@
         </p:nvSpPr>
         <p:spPr>
           <a:xfrm>
-            <a:off x="8659368" y="2194560"/>
-            <a:ext cx="2846527" cy="914400"/>
+            <a:off x="9055303" y="2029460"/>
+            <a:ext cx="2450592" cy="894080"/>
           </a:xfrm>
           <a:prstGeom prst="rect">
             <a:avLst/>
@@ -6568,7 +7593,7 @@
         </p:nvSpPr>
         <p:spPr>
           <a:xfrm>
-            <a:off x="8183880" y="3419856"/>
+            <a:off x="8579815" y="3224276"/>
             <a:ext cx="292608" cy="292608"/>
           </a:xfrm>
           <a:prstGeom prst="ellipse">
@@ -6593,8 +7618,8 @@
         </p:nvSpPr>
         <p:spPr>
           <a:xfrm>
-            <a:off x="8659368" y="3108960"/>
-            <a:ext cx="2846527" cy="914400"/>
+            <a:off x="9055303" y="2923540"/>
+            <a:ext cx="2450592" cy="894080"/>
           </a:xfrm>
           <a:prstGeom prst="rect">
             <a:avLst/>
@@ -6632,7 +7657,7 @@
         </p:nvSpPr>
         <p:spPr>
           <a:xfrm>
-            <a:off x="8183880" y="4334256"/>
+            <a:off x="8579815" y="4118356"/>
             <a:ext cx="292608" cy="292608"/>
           </a:xfrm>
           <a:prstGeom prst="ellipse">
@@ -6657,8 +7682,8 @@
         </p:nvSpPr>
         <p:spPr>
           <a:xfrm>
-            <a:off x="8659368" y="4023360"/>
-            <a:ext cx="2846527" cy="914400"/>
+            <a:off x="9055303" y="3817620"/>
+            <a:ext cx="2450592" cy="894080"/>
           </a:xfrm>
           <a:prstGeom prst="rect">
             <a:avLst/>
@@ -6696,7 +7721,7 @@
         </p:nvSpPr>
         <p:spPr>
           <a:xfrm>
-            <a:off x="8183880" y="5248656"/>
+            <a:off x="8579815" y="5012436"/>
             <a:ext cx="292608" cy="292608"/>
           </a:xfrm>
           <a:prstGeom prst="ellipse">
@@ -6721,8 +7746,8 @@
         </p:nvSpPr>
         <p:spPr>
           <a:xfrm>
-            <a:off x="8659368" y="4937760"/>
-            <a:ext cx="2846527" cy="914400"/>
+            <a:off x="9055303" y="4711700"/>
+            <a:ext cx="2450592" cy="894080"/>
           </a:xfrm>
           <a:prstGeom prst="rect">
             <a:avLst/>
@@ -6820,6 +7845,507 @@
             <a:fld id="{F7021451-1387-4CA6-816F-3879F97B5CBC}" type="slidenum">
               <a:rPr b="0" lang="en-US"/>
               <a:t>15</a:t>
+            </a:fld>
+            <a:endParaRPr lang="en-US"/>
+          </a:p>
+        </p:txBody>
+      </p:sp>
+    </p:spTree>
+  </p:cSld>
+  <p:clrMapOvr>
+    <a:masterClrMapping/>
+  </p:clrMapOvr>
+</p:sld>
+</file>
+
+<file path=ppt/slides/slide16.xml><?xml version="1.0" encoding="utf-8"?>
+<p:sld xmlns:a="http://schemas.openxmlformats.org/drawingml/2006/main" xmlns:r="http://schemas.openxmlformats.org/officeDocument/2006/relationships" xmlns:p="http://schemas.openxmlformats.org/presentationml/2006/main">
+  <p:cSld name="Slide 16">
+    <p:bg>
+      <p:bgPr>
+        <a:solidFill>
+          <a:srgbClr val="02BDC7"/>
+        </a:solidFill>
+      </p:bgPr>
+    </p:bg>
+    <p:spTree>
+      <p:nvGrpSpPr>
+        <p:cNvPr id="1" name=""/>
+        <p:cNvGrpSpPr/>
+        <p:nvPr/>
+      </p:nvGrpSpPr>
+      <p:grpSpPr>
+        <a:xfrm>
+          <a:off x="0" y="0"/>
+          <a:ext cx="0" cy="0"/>
+          <a:chOff x="0" y="0"/>
+          <a:chExt cx="0" cy="0"/>
+        </a:xfrm>
+      </p:grpSpPr>
+      <p:sp>
+        <p:nvSpPr>
+          <p:cNvPr id="2" name="Shape 0"/>
+          <p:cNvSpPr/>
+          <p:nvPr/>
+        </p:nvSpPr>
+        <p:spPr>
+          <a:xfrm>
+            <a:off x="4175608" y="1234440"/>
+            <a:ext cx="3840480" cy="3840480"/>
+          </a:xfrm>
+          <a:prstGeom prst="ellipse">
+            <a:avLst/>
+          </a:prstGeom>
+          <a:solidFill>
+            <a:srgbClr val="FFFEFA"/>
+          </a:solidFill>
+          <a:ln w="12700">
+            <a:solidFill>
+              <a:srgbClr val="FFFEFA"/>
+            </a:solidFill>
+            <a:prstDash val="solid"/>
+          </a:ln>
+          <a:effectLst>
+            <a:outerShdw sx="100000" sy="100000" kx="0" ky="0" algn="bl" rotWithShape="0" blurRad="177800" dist="50800" dir="5400000">
+              <a:srgbClr val="3C3828">
+                <a:alpha val="18000"/>
+              </a:srgbClr>
+            </a:outerShdw>
+          </a:effectLst>
+        </p:spPr>
+      </p:sp>
+      <p:sp>
+        <p:nvSpPr>
+          <p:cNvPr id="3" name="Text 1"/>
+          <p:cNvSpPr/>
+          <p:nvPr/>
+        </p:nvSpPr>
+        <p:spPr>
+          <a:xfrm>
+            <a:off x="4175608" y="2377440"/>
+            <a:ext cx="3840480" cy="1097280"/>
+          </a:xfrm>
+          <a:prstGeom prst="rect">
+            <a:avLst/>
+          </a:prstGeom>
+          <a:noFill/>
+          <a:ln/>
+        </p:spPr>
+        <p:txBody>
+          <a:bodyPr wrap="square" lIns="0" tIns="0" rIns="0" bIns="0" rtlCol="0" anchor="ctr"/>
+          <a:lstStyle/>
+          <a:p>
+            <a:pPr algn="ctr" indent="0" marL="0">
+              <a:buNone/>
+            </a:pPr>
+            <a:r>
+              <a:rPr lang="en-US" sz="7200" b="1" dirty="0">
+                <a:solidFill>
+                  <a:srgbClr val="3C3828"/>
+                </a:solidFill>
+                <a:latin typeface="Georgia" pitchFamily="34" charset="0"/>
+                <a:ea typeface="Georgia" pitchFamily="34" charset="-122"/>
+                <a:cs typeface="Georgia" pitchFamily="34" charset="-120"/>
+              </a:rPr>
+              <a:t>YAWP!</a:t>
+            </a:r>
+            <a:endParaRPr lang="en-US" sz="7200" dirty="0"/>
+          </a:p>
+        </p:txBody>
+      </p:sp>
+      <p:sp>
+        <p:nvSpPr>
+          <p:cNvPr id="4" name="Text 2"/>
+          <p:cNvSpPr/>
+          <p:nvPr/>
+        </p:nvSpPr>
+        <p:spPr>
+          <a:xfrm>
+            <a:off x="4175608" y="3520440"/>
+            <a:ext cx="3840480" cy="365760"/>
+          </a:xfrm>
+          <a:prstGeom prst="rect">
+            <a:avLst/>
+          </a:prstGeom>
+          <a:noFill/>
+          <a:ln/>
+        </p:spPr>
+        <p:txBody>
+          <a:bodyPr wrap="square" lIns="0" tIns="0" rIns="0" bIns="0" rtlCol="0" anchor="ctr"/>
+          <a:lstStyle/>
+          <a:p>
+            <a:pPr algn="ctr" indent="0" marL="0">
+              <a:buNone/>
+            </a:pPr>
+            <a:r>
+              <a:rPr lang="en-US" sz="1300" b="1" spc="300" kern="0" dirty="0">
+                <a:solidFill>
+                  <a:srgbClr val="D27151"/>
+                </a:solidFill>
+                <a:latin typeface="Consolas" pitchFamily="34" charset="0"/>
+                <a:ea typeface="Consolas" pitchFamily="34" charset="-122"/>
+                <a:cs typeface="Consolas" pitchFamily="34" charset="-120"/>
+              </a:rPr>
+              <a:t>WRITING PROGRAM</a:t>
+            </a:r>
+            <a:endParaRPr lang="en-US" sz="1300" dirty="0"/>
+          </a:p>
+        </p:txBody>
+      </p:sp>
+      <p:sp>
+        <p:nvSpPr>
+          <p:cNvPr id="5" name="Shape 3"/>
+          <p:cNvSpPr/>
+          <p:nvPr/>
+        </p:nvSpPr>
+        <p:spPr>
+          <a:xfrm>
+            <a:off x="6918808" y="777240"/>
+            <a:ext cx="1463040" cy="1463040"/>
+          </a:xfrm>
+          <a:prstGeom prst="ellipse">
+            <a:avLst/>
+          </a:prstGeom>
+          <a:solidFill>
+            <a:srgbClr val="FFB600"/>
+          </a:solidFill>
+          <a:ln w="12700">
+            <a:solidFill>
+              <a:srgbClr val="FFB600"/>
+            </a:solidFill>
+            <a:prstDash val="solid"/>
+          </a:ln>
+        </p:spPr>
+      </p:sp>
+      <p:pic>
+        <p:nvPicPr>
+          <p:cNvPr id="6" name="Image 0" descr="lightbulb icon">    </p:cNvPr>
+          <p:cNvPicPr>
+            <a:picLocks noChangeAspect="1"/>
+          </p:cNvPicPr>
+          <p:nvPr/>
+        </p:nvPicPr>
+        <p:blipFill>
+          <a:blip r:embed="rId1"/>
+          <a:stretch>
+            <a:fillRect/>
+          </a:stretch>
+        </p:blipFill>
+        <p:spPr>
+          <a:xfrm>
+            <a:off x="7211416" y="1069848"/>
+            <a:ext cx="877824" cy="877824"/>
+          </a:xfrm>
+          <a:prstGeom prst="rect">
+            <a:avLst/>
+          </a:prstGeom>
+        </p:spPr>
+      </p:pic>
+      <p:sp>
+        <p:nvSpPr>
+          <p:cNvPr id="7" name="Shape 4"/>
+          <p:cNvSpPr/>
+          <p:nvPr/>
+        </p:nvSpPr>
+        <p:spPr>
+          <a:xfrm>
+            <a:off x="3626968" y="1508760"/>
+            <a:ext cx="1005840" cy="1005840"/>
+          </a:xfrm>
+          <a:prstGeom prst="ellipse">
+            <a:avLst/>
+          </a:prstGeom>
+          <a:solidFill>
+            <a:srgbClr val="FF9755"/>
+          </a:solidFill>
+          <a:ln w="12700">
+            <a:solidFill>
+              <a:srgbClr val="FF9755"/>
+            </a:solidFill>
+            <a:prstDash val="solid"/>
+          </a:ln>
+        </p:spPr>
+      </p:sp>
+      <p:pic>
+        <p:nvPicPr>
+          <p:cNvPr id="8" name="Image 1" descr="puzzle icon">    </p:cNvPr>
+          <p:cNvPicPr>
+            <a:picLocks noChangeAspect="1"/>
+          </p:cNvPicPr>
+          <p:nvPr/>
+        </p:nvPicPr>
+        <p:blipFill>
+          <a:blip r:embed="rId2"/>
+          <a:stretch>
+            <a:fillRect/>
+          </a:stretch>
+        </p:blipFill>
+        <p:spPr>
+          <a:xfrm>
+            <a:off x="3828136" y="1709928"/>
+            <a:ext cx="603504" cy="603504"/>
+          </a:xfrm>
+          <a:prstGeom prst="rect">
+            <a:avLst/>
+          </a:prstGeom>
+        </p:spPr>
+      </p:pic>
+      <p:sp>
+        <p:nvSpPr>
+          <p:cNvPr id="9" name="Shape 5"/>
+          <p:cNvSpPr/>
+          <p:nvPr/>
+        </p:nvSpPr>
+        <p:spPr>
+          <a:xfrm>
+            <a:off x="4267048" y="4069080"/>
+            <a:ext cx="1188720" cy="1188720"/>
+          </a:xfrm>
+          <a:prstGeom prst="ellipse">
+            <a:avLst/>
+          </a:prstGeom>
+          <a:solidFill>
+            <a:srgbClr val="FC4540"/>
+          </a:solidFill>
+          <a:ln w="12700">
+            <a:solidFill>
+              <a:srgbClr val="FC4540"/>
+            </a:solidFill>
+            <a:prstDash val="solid"/>
+          </a:ln>
+        </p:spPr>
+      </p:sp>
+      <p:pic>
+        <p:nvPicPr>
+          <p:cNvPr id="10" name="Image 2" descr="thumbs icon">    </p:cNvPr>
+          <p:cNvPicPr>
+            <a:picLocks noChangeAspect="1"/>
+          </p:cNvPicPr>
+          <p:nvPr/>
+        </p:nvPicPr>
+        <p:blipFill>
+          <a:blip r:embed="rId3"/>
+          <a:stretch>
+            <a:fillRect/>
+          </a:stretch>
+        </p:blipFill>
+        <p:spPr>
+          <a:xfrm>
+            <a:off x="4504792" y="4306824"/>
+            <a:ext cx="713232" cy="713232"/>
+          </a:xfrm>
+          <a:prstGeom prst="rect">
+            <a:avLst/>
+          </a:prstGeom>
+        </p:spPr>
+      </p:pic>
+      <p:sp>
+        <p:nvSpPr>
+          <p:cNvPr id="11" name="Shape 6"/>
+          <p:cNvSpPr/>
+          <p:nvPr/>
+        </p:nvSpPr>
+        <p:spPr>
+          <a:xfrm>
+            <a:off x="3855568" y="2971800"/>
+            <a:ext cx="274320" cy="274320"/>
+          </a:xfrm>
+          <a:prstGeom prst="ellipse">
+            <a:avLst/>
+          </a:prstGeom>
+          <a:solidFill>
+            <a:srgbClr val="FFFEFA"/>
+          </a:solidFill>
+          <a:ln w="12700">
+            <a:solidFill>
+              <a:srgbClr val="FFFEFA"/>
+            </a:solidFill>
+            <a:prstDash val="solid"/>
+          </a:ln>
+        </p:spPr>
+      </p:sp>
+      <p:sp>
+        <p:nvSpPr>
+          <p:cNvPr id="12" name="Shape 7"/>
+          <p:cNvSpPr/>
+          <p:nvPr/>
+        </p:nvSpPr>
+        <p:spPr>
+          <a:xfrm>
+            <a:off x="8107528" y="2606040"/>
+            <a:ext cx="411480" cy="411480"/>
+          </a:xfrm>
+          <a:prstGeom prst="ellipse">
+            <a:avLst/>
+          </a:prstGeom>
+          <a:solidFill>
+            <a:srgbClr val="FC4067"/>
+          </a:solidFill>
+          <a:ln w="12700">
+            <a:solidFill>
+              <a:srgbClr val="FC4067"/>
+            </a:solidFill>
+            <a:prstDash val="solid"/>
+          </a:ln>
+        </p:spPr>
+      </p:sp>
+      <p:sp>
+        <p:nvSpPr>
+          <p:cNvPr id="13" name="Shape 8"/>
+          <p:cNvSpPr/>
+          <p:nvPr/>
+        </p:nvSpPr>
+        <p:spPr>
+          <a:xfrm>
+            <a:off x="7558888" y="5120640"/>
+            <a:ext cx="548640" cy="548640"/>
+          </a:xfrm>
+          <a:prstGeom prst="ellipse">
+            <a:avLst/>
+          </a:prstGeom>
+          <a:solidFill>
+            <a:srgbClr val="FF9755"/>
+          </a:solidFill>
+          <a:ln w="12700">
+            <a:solidFill>
+              <a:srgbClr val="FF9755"/>
+            </a:solidFill>
+            <a:prstDash val="solid"/>
+          </a:ln>
+        </p:spPr>
+      </p:sp>
+      <p:sp>
+        <p:nvSpPr>
+          <p:cNvPr id="14" name="Shape 9"/>
+          <p:cNvSpPr/>
+          <p:nvPr/>
+        </p:nvSpPr>
+        <p:spPr>
+          <a:xfrm>
+            <a:off x="6735928" y="5349240"/>
+            <a:ext cx="164592" cy="164592"/>
+          </a:xfrm>
+          <a:prstGeom prst="ellipse">
+            <a:avLst/>
+          </a:prstGeom>
+          <a:solidFill>
+            <a:srgbClr val="FFB600"/>
+          </a:solidFill>
+          <a:ln w="12700">
+            <a:solidFill>
+              <a:srgbClr val="FFB600"/>
+            </a:solidFill>
+            <a:prstDash val="solid"/>
+          </a:ln>
+        </p:spPr>
+      </p:sp>
+      <p:sp>
+        <p:nvSpPr>
+          <p:cNvPr id="15" name="Shape 10"/>
+          <p:cNvSpPr/>
+          <p:nvPr/>
+        </p:nvSpPr>
+        <p:spPr>
+          <a:xfrm>
+            <a:off x="5455768" y="5257800"/>
+            <a:ext cx="201168" cy="201168"/>
+          </a:xfrm>
+          <a:prstGeom prst="ellipse">
+            <a:avLst/>
+          </a:prstGeom>
+          <a:solidFill>
+            <a:srgbClr val="FFFEFA"/>
+          </a:solidFill>
+          <a:ln w="12700">
+            <a:solidFill>
+              <a:srgbClr val="FFFEFA"/>
+            </a:solidFill>
+            <a:prstDash val="solid"/>
+          </a:ln>
+        </p:spPr>
+      </p:sp>
+      <p:sp>
+        <p:nvSpPr>
+          <p:cNvPr id="16" name="Text 11"/>
+          <p:cNvSpPr/>
+          <p:nvPr/>
+        </p:nvSpPr>
+        <p:spPr>
+          <a:xfrm>
+            <a:off x="685800" y="5577840"/>
+            <a:ext cx="10820095" cy="548640"/>
+          </a:xfrm>
+          <a:prstGeom prst="rect">
+            <a:avLst/>
+          </a:prstGeom>
+          <a:noFill/>
+          <a:ln/>
+        </p:spPr>
+        <p:txBody>
+          <a:bodyPr wrap="square" lIns="0" tIns="0" rIns="0" bIns="0" rtlCol="0" anchor="ctr"/>
+          <a:lstStyle/>
+          <a:p>
+            <a:pPr algn="ctr" indent="0" marL="0">
+              <a:buNone/>
+            </a:pPr>
+            <a:r>
+              <a:rPr lang="en-US" sz="2200" dirty="0">
+                <a:solidFill>
+                  <a:srgbClr val="FFFEFA"/>
+                </a:solidFill>
+                <a:latin typeface="Calibri" pitchFamily="34" charset="0"/>
+                <a:ea typeface="Calibri" pitchFamily="34" charset="-122"/>
+                <a:cs typeface="Calibri" pitchFamily="34" charset="-120"/>
+              </a:rPr>
+              <a:t>Next time: pre-writing.</a:t>
+            </a:r>
+            <a:endParaRPr lang="en-US" sz="2200" dirty="0"/>
+          </a:p>
+        </p:txBody>
+      </p:sp>
+      <p:sp>
+        <p:nvSpPr>
+          <p:cNvPr id="25" name="Slide Number Placeholder 0"/>
+          <p:cNvSpPr>
+            <a:spLocks noGrp="1"/>
+          </p:cNvSpPr>
+          <p:nvPr>
+            <p:ph type="sldNum" sz="quarter" idx="4294967295"/>
+          </p:nvPr>
+        </p:nvSpPr>
+        <p:spPr>
+          <a:xfrm>
+            <a:off x="10957255" y="6355080"/>
+            <a:ext cx="548640" cy="320040"/>
+          </a:xfrm>
+          <a:prstGeom prst="rect">
+            <a:avLst/>
+          </a:prstGeom>
+          <a:extLst>
+            <a:ext uri="{C572A759-6A51-4108-AA02-DFA0A04FC94B}">
+              <ma14:wrappingTextBoxFlag xmlns:ma14="http://schemas.microsoft.com/office/mac/drawingml/2011/main" val="0"/>
+            </a:ext>
+          </a:extLst>
+        </p:spPr>
+        <p:txBody>
+          <a:bodyPr/>
+          <a:lstStyle>
+            <a:lvl1pPr>
+              <a:defRPr sz="1000">
+                <a:solidFill>
+                  <a:srgbClr val="7E7C78"/>
+                </a:solidFill>
+                <a:latin typeface="Consolas"/>
+                <a:ea typeface="Consolas"/>
+                <a:cs typeface="Consolas"/>
+              </a:defRPr>
+            </a:lvl1pPr>
+          </a:lstStyle>
+          <a:p>
+            <a:pPr algn="r"/>
+            <a:fld id="{F7021451-1387-4CA6-816F-3879F97B5CBC}" type="slidenum">
+              <a:rPr b="0" lang="en-US"/>
+              <a:t>16</a:t>
             </a:fld>
             <a:endParaRPr lang="en-US"/>
           </a:p>
@@ -6922,7 +8448,7 @@
                 <a:ea typeface="Georgia" pitchFamily="34" charset="-122"/>
                 <a:cs typeface="Georgia" pitchFamily="34" charset="-120"/>
               </a:rPr>
-              <a:t>2 Truths and a Lie</a:t>
+              <a:t>2 Truths and a Lie</a:t>
             </a:r>
             <a:endParaRPr lang="en-US" sz="3600" dirty="0"/>
           </a:p>
@@ -7264,7 +8790,7 @@
               <a:buNone/>
             </a:pPr>
             <a:r>
-              <a:rPr lang="en-US" sz="2600" dirty="0">
+              <a:rPr lang="en-US" sz="2800" dirty="0">
                 <a:solidFill>
                   <a:srgbClr val="3C3828"/>
                 </a:solidFill>
@@ -7274,7 +8800,7 @@
               </a:rPr>
               <a:t>I have a twin who is a blonde-haired version of me.</a:t>
             </a:r>
-            <a:endParaRPr lang="en-US" sz="2600" dirty="0"/>
+            <a:endParaRPr lang="en-US" sz="2800" dirty="0"/>
           </a:p>
         </p:txBody>
       </p:sp>
@@ -7426,7 +8952,7 @@
               <a:buNone/>
             </a:pPr>
             <a:r>
-              <a:rPr lang="en-US" sz="2600" dirty="0">
+              <a:rPr lang="en-US" sz="2800" dirty="0">
                 <a:solidFill>
                   <a:srgbClr val="3C3828"/>
                 </a:solidFill>
@@ -7436,7 +8962,7 @@
               </a:rPr>
               <a:t>I was born in Canada.</a:t>
             </a:r>
-            <a:endParaRPr lang="en-US" sz="2600" dirty="0"/>
+            <a:endParaRPr lang="en-US" sz="2800" dirty="0"/>
           </a:p>
         </p:txBody>
       </p:sp>
@@ -7588,7 +9114,7 @@
               <a:buNone/>
             </a:pPr>
             <a:r>
-              <a:rPr lang="en-US" sz="2600" dirty="0">
+              <a:rPr lang="en-US" sz="2800" dirty="0">
                 <a:solidFill>
                   <a:srgbClr val="3C3828"/>
                 </a:solidFill>
@@ -7598,7 +9124,7 @@
               </a:rPr>
               <a:t>I met my wife in high school.</a:t>
             </a:r>
-            <a:endParaRPr lang="en-US" sz="2600" dirty="0"/>
+            <a:endParaRPr lang="en-US" sz="2800" dirty="0"/>
           </a:p>
         </p:txBody>
       </p:sp>
@@ -7747,7 +9273,7 @@
                 <a:ea typeface="Georgia" pitchFamily="34" charset="-122"/>
                 <a:cs typeface="Georgia" pitchFamily="34" charset="-120"/>
               </a:rPr>
-              <a:t>I am Brian Connell</a:t>
+              <a:t>I am Brian Connell</a:t>
             </a:r>
             <a:endParaRPr lang="en-US" sz="3600" dirty="0"/>
           </a:p>
@@ -8001,7 +9527,7 @@
                 <a:ea typeface="Georgia" pitchFamily="34" charset="-122"/>
                 <a:cs typeface="Georgia" pitchFamily="34" charset="-120"/>
               </a:rPr>
-              <a:t>I am also Brian Connell</a:t>
+              <a:t>I am also Brian Connell</a:t>
             </a:r>
             <a:endParaRPr lang="en-US" sz="3600" dirty="0"/>
           </a:p>
@@ -8410,7 +9936,7 @@
                 <a:ea typeface="Georgia" pitchFamily="34" charset="-122"/>
                 <a:cs typeface="Georgia" pitchFamily="34" charset="-120"/>
               </a:rPr>
-              <a:t>the lie has to be believable!</a:t>
+              <a:t>the lie has to be believable!</a:t>
             </a:r>
             <a:endParaRPr lang="en-US" sz="4000" dirty="0"/>
           </a:p>
@@ -9115,7 +10641,7 @@
                 <a:ea typeface="Georgia" pitchFamily="34" charset="-122"/>
                 <a:cs typeface="Georgia" pitchFamily="34" charset="-120"/>
               </a:rPr>
-              <a:t>What do you think “yawp” means?</a:t>
+              <a:t>What do you think “yawp” means?</a:t>
             </a:r>
             <a:endParaRPr lang="en-US" sz="3600" dirty="0"/>
           </a:p>
@@ -9247,7 +10773,7 @@
               <a:buNone/>
             </a:pPr>
             <a:r>
-              <a:rPr lang="en-US" sz="2600" i="1" dirty="0">
+              <a:rPr lang="en-US" sz="3000" i="1" dirty="0">
                 <a:solidFill>
                   <a:srgbClr val="3C3828"/>
                 </a:solidFill>
@@ -9255,9 +10781,9 @@
                 <a:ea typeface="Georgia" pitchFamily="34" charset="-122"/>
                 <a:cs typeface="Georgia" pitchFamily="34" charset="-120"/>
               </a:rPr>
-              <a:t>I sound my barbaric yawp over the roofs of the world.</a:t>
-            </a:r>
-            <a:endParaRPr lang="en-US" sz="2600" dirty="0"/>
+              <a:t>I sound my barbaric yawp over the roofs of the world.</a:t>
+            </a:r>
+            <a:endParaRPr lang="en-US" sz="3000" dirty="0"/>
           </a:p>
         </p:txBody>
       </p:sp>
@@ -9445,7 +10971,7 @@
                 <a:ea typeface="Georgia" pitchFamily="34" charset="-122"/>
                 <a:cs typeface="Georgia" pitchFamily="34" charset="-120"/>
               </a:rPr>
-              <a:t>Why do we write?</a:t>
+              <a:t>Why do we write?</a:t>
             </a:r>
             <a:endParaRPr lang="en-US" sz="3600" dirty="0"/>
           </a:p>
@@ -9558,8 +11084,8 @@
         </p:nvSpPr>
         <p:spPr>
           <a:xfrm>
-            <a:off x="685800" y="1965960"/>
-            <a:ext cx="3393338" cy="3749040"/>
+            <a:off x="685800" y="2063496"/>
+            <a:ext cx="3393338" cy="3919728"/>
           </a:xfrm>
           <a:prstGeom prst="roundRect">
             <a:avLst>
@@ -9592,7 +11118,7 @@
         </p:nvSpPr>
         <p:spPr>
           <a:xfrm>
-            <a:off x="813816" y="1965960"/>
+            <a:off x="813816" y="2063496"/>
             <a:ext cx="3137306" cy="91440"/>
           </a:xfrm>
           <a:prstGeom prst="rect">
@@ -9617,7 +11143,7 @@
         </p:nvSpPr>
         <p:spPr>
           <a:xfrm>
-            <a:off x="1005840" y="2331720"/>
+            <a:off x="1005840" y="2429256"/>
             <a:ext cx="731520" cy="731520"/>
           </a:xfrm>
           <a:prstGeom prst="ellipse">
@@ -9642,7 +11168,7 @@
         </p:nvSpPr>
         <p:spPr>
           <a:xfrm>
-            <a:off x="1005840" y="2331720"/>
+            <a:off x="1005840" y="2429256"/>
             <a:ext cx="731520" cy="731520"/>
           </a:xfrm>
           <a:prstGeom prst="rect">
@@ -9681,8 +11207,8 @@
         </p:nvSpPr>
         <p:spPr>
           <a:xfrm>
-            <a:off x="1005840" y="3246120"/>
-            <a:ext cx="2753258" cy="2286000"/>
+            <a:off x="1005840" y="3343656"/>
+            <a:ext cx="2753258" cy="2456688"/>
           </a:xfrm>
           <a:prstGeom prst="rect">
             <a:avLst/>
@@ -9698,7 +11224,7 @@
               <a:buNone/>
             </a:pPr>
             <a:r>
-              <a:rPr lang="en-US" sz="2100" dirty="0">
+              <a:rPr lang="en-US" sz="2200" dirty="0">
                 <a:solidFill>
                   <a:srgbClr val="3C3828"/>
                 </a:solidFill>
@@ -9709,7 +11235,7 @@
               <a:t>Because we have </a:t>
             </a:r>
             <a:r>
-              <a:rPr lang="en-US" sz="2100" dirty="0">
+              <a:rPr lang="en-US" sz="2200" dirty="0">
                 <a:solidFill>
                   <a:srgbClr val="3C3828"/>
                 </a:solidFill>
@@ -9723,7 +11249,7 @@
               <a:t>things to say!</a:t>
             </a:r>
             <a:r>
-              <a:rPr lang="en-US" sz="2100" dirty="0">
+              <a:rPr lang="en-US" sz="2200" dirty="0">
                 <a:solidFill>
                   <a:srgbClr val="3C3828"/>
                 </a:solidFill>
@@ -9733,7 +11259,7 @@
               </a:rPr>
               <a:t> (Our individual “yawp.”)</a:t>
             </a:r>
-            <a:endParaRPr lang="en-US" sz="2100" dirty="0"/>
+            <a:endParaRPr lang="en-US" sz="2200" dirty="0"/>
           </a:p>
         </p:txBody>
       </p:sp>
@@ -9745,8 +11271,8 @@
         </p:nvSpPr>
         <p:spPr>
           <a:xfrm>
-            <a:off x="4399178" y="1965960"/>
-            <a:ext cx="3393338" cy="3749040"/>
+            <a:off x="4399178" y="2063496"/>
+            <a:ext cx="3393338" cy="3919728"/>
           </a:xfrm>
           <a:prstGeom prst="roundRect">
             <a:avLst>
@@ -9779,7 +11305,7 @@
         </p:nvSpPr>
         <p:spPr>
           <a:xfrm>
-            <a:off x="4527194" y="1965960"/>
+            <a:off x="4527194" y="2063496"/>
             <a:ext cx="3137306" cy="91440"/>
           </a:xfrm>
           <a:prstGeom prst="rect">
@@ -9804,7 +11330,7 @@
         </p:nvSpPr>
         <p:spPr>
           <a:xfrm>
-            <a:off x="4719218" y="2331720"/>
+            <a:off x="4719218" y="2429256"/>
             <a:ext cx="731520" cy="731520"/>
           </a:xfrm>
           <a:prstGeom prst="ellipse">
@@ -9829,7 +11355,7 @@
         </p:nvSpPr>
         <p:spPr>
           <a:xfrm>
-            <a:off x="4719218" y="2331720"/>
+            <a:off x="4719218" y="2429256"/>
             <a:ext cx="731520" cy="731520"/>
           </a:xfrm>
           <a:prstGeom prst="rect">
@@ -9868,8 +11394,8 @@
         </p:nvSpPr>
         <p:spPr>
           <a:xfrm>
-            <a:off x="4719218" y="3246120"/>
-            <a:ext cx="2753258" cy="2286000"/>
+            <a:off x="4719218" y="3343656"/>
+            <a:ext cx="2753258" cy="2456688"/>
           </a:xfrm>
           <a:prstGeom prst="rect">
             <a:avLst/>
@@ -9885,7 +11411,7 @@
               <a:buNone/>
             </a:pPr>
             <a:r>
-              <a:rPr lang="en-US" sz="2100" dirty="0">
+              <a:rPr lang="en-US" sz="2200" dirty="0">
                 <a:solidFill>
                   <a:srgbClr val="3C3828"/>
                 </a:solidFill>
@@ -9896,7 +11422,7 @@
               <a:t>Because writing is one of the most effective ways of </a:t>
             </a:r>
             <a:r>
-              <a:rPr lang="en-US" sz="2100" dirty="0">
+              <a:rPr lang="en-US" sz="2200" dirty="0">
                 <a:solidFill>
                   <a:srgbClr val="3C3828"/>
                 </a:solidFill>
@@ -9910,7 +11436,7 @@
               <a:t>expressing ourselves.</a:t>
             </a:r>
             <a:r>
-              <a:rPr lang="en-US" sz="2100" dirty="0">
+              <a:rPr lang="en-US" sz="2200" dirty="0">
                 <a:solidFill>
                   <a:srgbClr val="3C3828"/>
                 </a:solidFill>
@@ -9920,7 +11446,7 @@
               </a:rPr>
               <a:t> (What other ways can we express ourselves?)</a:t>
             </a:r>
-            <a:endParaRPr lang="en-US" sz="2100" dirty="0"/>
+            <a:endParaRPr lang="en-US" sz="2200" dirty="0"/>
           </a:p>
         </p:txBody>
       </p:sp>
@@ -9932,8 +11458,8 @@
         </p:nvSpPr>
         <p:spPr>
           <a:xfrm>
-            <a:off x="8112557" y="1965960"/>
-            <a:ext cx="3393338" cy="3749040"/>
+            <a:off x="8112557" y="2063496"/>
+            <a:ext cx="3393338" cy="3919728"/>
           </a:xfrm>
           <a:prstGeom prst="roundRect">
             <a:avLst>
@@ -9966,7 +11492,7 @@
         </p:nvSpPr>
         <p:spPr>
           <a:xfrm>
-            <a:off x="8240573" y="1965960"/>
+            <a:off x="8240573" y="2063496"/>
             <a:ext cx="3137306" cy="91440"/>
           </a:xfrm>
           <a:prstGeom prst="rect">
@@ -9991,7 +11517,7 @@
         </p:nvSpPr>
         <p:spPr>
           <a:xfrm>
-            <a:off x="8432597" y="2331720"/>
+            <a:off x="8432597" y="2429256"/>
             <a:ext cx="731520" cy="731520"/>
           </a:xfrm>
           <a:prstGeom prst="ellipse">
@@ -10016,7 +11542,7 @@
         </p:nvSpPr>
         <p:spPr>
           <a:xfrm>
-            <a:off x="8432597" y="2331720"/>
+            <a:off x="8432597" y="2429256"/>
             <a:ext cx="731520" cy="731520"/>
           </a:xfrm>
           <a:prstGeom prst="rect">
@@ -10055,8 +11581,8 @@
         </p:nvSpPr>
         <p:spPr>
           <a:xfrm>
-            <a:off x="8432597" y="3246120"/>
-            <a:ext cx="2753258" cy="2286000"/>
+            <a:off x="8432597" y="3343656"/>
+            <a:ext cx="2753258" cy="2456688"/>
           </a:xfrm>
           <a:prstGeom prst="rect">
             <a:avLst/>
@@ -10072,7 +11598,7 @@
               <a:buNone/>
             </a:pPr>
             <a:r>
-              <a:rPr lang="en-US" sz="2100" dirty="0">
+              <a:rPr lang="en-US" sz="2200" dirty="0">
                 <a:solidFill>
                   <a:srgbClr val="3C3828"/>
                 </a:solidFill>
@@ -10083,7 +11609,7 @@
               <a:t>Because </a:t>
             </a:r>
             <a:r>
-              <a:rPr lang="en-US" sz="2100" dirty="0">
+              <a:rPr lang="en-US" sz="2200" dirty="0">
                 <a:solidFill>
                   <a:srgbClr val="3C3828"/>
                 </a:solidFill>
@@ -10096,7 +11622,7 @@
               </a:rPr>
               <a:t>writing is power.</a:t>
             </a:r>
-            <a:endParaRPr lang="en-US" sz="2100" dirty="0"/>
+            <a:endParaRPr lang="en-US" sz="2200" dirty="0"/>
           </a:p>
         </p:txBody>
       </p:sp>
@@ -10287,7 +11813,7 @@
                 <a:ea typeface="Georgia" pitchFamily="34" charset="-122"/>
                 <a:cs typeface="Georgia" pitchFamily="34" charset="-120"/>
               </a:rPr>
-              <a:t>“Bored in the USA”</a:t>
+              <a:t>“Bored in the USA”</a:t>
             </a:r>
             <a:endParaRPr lang="en-US" sz="4000" dirty="0"/>
           </a:p>

--- a/services/web-app/resources/thesis-essay-decks/lesson-1-day-1.pptx
+++ b/services/web-app/resources/thesis-essay-decks/lesson-1-day-1.pptx
@@ -2803,7 +2803,7 @@
               <a:buNone/>
             </a:pPr>
             <a:r>
-              <a:rPr lang="en-US" sz="1300" b="1" spc="200" kern="0" dirty="0">
+              <a:rPr lang="en-US" sz="1300" b="1" dirty="0">
                 <a:solidFill>
                   <a:srgbClr val="02BDC7"/>
                 </a:solidFill>
@@ -2811,7 +2811,7 @@
                 <a:ea typeface="Consolas" pitchFamily="34" charset="-122"/>
                 <a:cs typeface="Consolas" pitchFamily="34" charset="-120"/>
               </a:rPr>
-              <a:t>THESIS-DRIVEN ESSAY · LESSON 1</a:t>
+              <a:t>Thesis-Driven Essay · Lesson 1</a:t>
             </a:r>
             <a:endParaRPr lang="en-US" sz="1300" dirty="0"/>
           </a:p>
@@ -3121,7 +3121,7 @@
               <a:buNone/>
             </a:pPr>
             <a:r>
-              <a:rPr lang="en-US" sz="1200" b="1" spc="200" kern="0" dirty="0">
+              <a:rPr lang="en-US" sz="1200" b="1" dirty="0">
                 <a:solidFill>
                   <a:srgbClr val="02BDC7"/>
                 </a:solidFill>
@@ -3129,7 +3129,7 @@
                 <a:ea typeface="Consolas" pitchFamily="34" charset="-122"/>
                 <a:cs typeface="Consolas" pitchFamily="34" charset="-120"/>
               </a:rPr>
-              <a:t>CLASS DISCUSSION</a:t>
+              <a:t>Class discussion</a:t>
             </a:r>
             <a:endParaRPr lang="en-US" sz="1200" dirty="0"/>
           </a:p>
@@ -3871,7 +3871,7 @@
               <a:buNone/>
             </a:pPr>
             <a:r>
-              <a:rPr lang="en-US" sz="1200" b="1" spc="200" kern="0" dirty="0">
+              <a:rPr lang="en-US" sz="1200" b="1" dirty="0">
                 <a:solidFill>
                   <a:srgbClr val="02BDC7"/>
                 </a:solidFill>
@@ -3879,7 +3879,7 @@
                 <a:ea typeface="Consolas" pitchFamily="34" charset="-122"/>
                 <a:cs typeface="Consolas" pitchFamily="34" charset="-120"/>
               </a:rPr>
-              <a:t>THE FORM</a:t>
+              <a:t>The form</a:t>
             </a:r>
             <a:endParaRPr lang="en-US" sz="1200" dirty="0"/>
           </a:p>
@@ -4818,7 +4818,7 @@
               <a:buNone/>
             </a:pPr>
             <a:r>
-              <a:rPr lang="en-US" sz="1200" b="1" spc="200" kern="0" dirty="0">
+              <a:rPr lang="en-US" sz="1200" b="1" dirty="0">
                 <a:solidFill>
                   <a:srgbClr val="FF9755"/>
                 </a:solidFill>
@@ -4826,7 +4826,7 @@
                 <a:ea typeface="Consolas" pitchFamily="34" charset="-122"/>
                 <a:cs typeface="Consolas" pitchFamily="34" charset="-120"/>
               </a:rPr>
-              <a:t>WHY WE’RE HERE</a:t>
+              <a:t>Why we’re here</a:t>
             </a:r>
             <a:endParaRPr lang="en-US" sz="1200" dirty="0"/>
           </a:p>
@@ -5618,7 +5618,7 @@
               <a:buNone/>
             </a:pPr>
             <a:r>
-              <a:rPr lang="en-US" sz="1200" b="1" spc="200" kern="0" dirty="0">
+              <a:rPr lang="en-US" sz="1200" b="1" dirty="0">
                 <a:solidFill>
                   <a:srgbClr val="02BDC7"/>
                 </a:solidFill>
@@ -5626,7 +5626,7 @@
                 <a:ea typeface="Consolas" pitchFamily="34" charset="-122"/>
                 <a:cs typeface="Consolas" pitchFamily="34" charset="-120"/>
               </a:rPr>
-              <a:t>GET EVERYONE IN</a:t>
+              <a:t>Get everyone in</a:t>
             </a:r>
             <a:endParaRPr lang="en-US" sz="1200" dirty="0"/>
           </a:p>
@@ -6413,7 +6413,7 @@
               <a:buNone/>
             </a:pPr>
             <a:r>
-              <a:rPr lang="en-US" sz="1200" b="1" spc="200" kern="0" dirty="0">
+              <a:rPr lang="en-US" sz="1200" b="1" dirty="0">
                 <a:solidFill>
                   <a:srgbClr val="FFB600"/>
                 </a:solidFill>
@@ -6421,7 +6421,7 @@
                 <a:ea typeface="Consolas" pitchFamily="34" charset="-122"/>
                 <a:cs typeface="Consolas" pitchFamily="34" charset="-120"/>
               </a:rPr>
-              <a:t>FOR STUDENTS</a:t>
+              <a:t>For students</a:t>
             </a:r>
             <a:endParaRPr lang="en-US" sz="1200" dirty="0"/>
           </a:p>
@@ -7410,7 +7410,7 @@
               <a:buNone/>
             </a:pPr>
             <a:r>
-              <a:rPr lang="en-US" sz="1200" b="1" spc="200" kern="0" dirty="0">
+              <a:rPr lang="en-US" sz="1200" b="1" dirty="0">
                 <a:solidFill>
                   <a:srgbClr val="FC4540"/>
                 </a:solidFill>
@@ -7418,7 +7418,7 @@
                 <a:ea typeface="Consolas" pitchFamily="34" charset="-122"/>
                 <a:cs typeface="Consolas" pitchFamily="34" charset="-120"/>
               </a:rPr>
-              <a:t>YOU’RE IN</a:t>
+              <a:t>You’re in</a:t>
             </a:r>
             <a:endParaRPr lang="en-US" sz="1200" dirty="0"/>
           </a:p>
@@ -8401,7 +8401,7 @@
               <a:buNone/>
             </a:pPr>
             <a:r>
-              <a:rPr lang="en-US" sz="1200" b="1" spc="200" kern="0" dirty="0">
+              <a:rPr lang="en-US" sz="1200" b="1" dirty="0">
                 <a:solidFill>
                   <a:srgbClr val="02BDC7"/>
                 </a:solidFill>
@@ -8409,7 +8409,7 @@
                 <a:ea typeface="Consolas" pitchFamily="34" charset="-122"/>
                 <a:cs typeface="Consolas" pitchFamily="34" charset="-120"/>
               </a:rPr>
-              <a:t>2 TRUTHS AND A LIE</a:t>
+              <a:t>2 Truths and a Lie</a:t>
             </a:r>
             <a:endParaRPr lang="en-US" sz="1200" dirty="0"/>
           </a:p>
@@ -9226,7 +9226,7 @@
               <a:buNone/>
             </a:pPr>
             <a:r>
-              <a:rPr lang="en-US" sz="1200" b="1" spc="200" kern="0" dirty="0">
+              <a:rPr lang="en-US" sz="1200" b="1" dirty="0">
                 <a:solidFill>
                   <a:srgbClr val="02BDC7"/>
                 </a:solidFill>
@@ -9234,7 +9234,7 @@
                 <a:ea typeface="Consolas" pitchFamily="34" charset="-122"/>
                 <a:cs typeface="Consolas" pitchFamily="34" charset="-120"/>
               </a:rPr>
-              <a:t>THE REVEAL</a:t>
+              <a:t>The reveal</a:t>
             </a:r>
             <a:endParaRPr lang="en-US" sz="1200" dirty="0"/>
           </a:p>
@@ -9480,7 +9480,7 @@
               <a:buNone/>
             </a:pPr>
             <a:r>
-              <a:rPr lang="en-US" sz="1200" b="1" spc="200" kern="0" dirty="0">
+              <a:rPr lang="en-US" sz="1200" b="1" dirty="0">
                 <a:solidFill>
                   <a:srgbClr val="FFB600"/>
                 </a:solidFill>
@@ -9488,7 +9488,7 @@
                 <a:ea typeface="Consolas" pitchFamily="34" charset="-122"/>
                 <a:cs typeface="Consolas" pitchFamily="34" charset="-120"/>
               </a:rPr>
-              <a:t>THE REVEAL</a:t>
+              <a:t>The reveal</a:t>
             </a:r>
             <a:endParaRPr lang="en-US" sz="1200" dirty="0"/>
           </a:p>
@@ -9734,7 +9734,7 @@
               <a:buNone/>
             </a:pPr>
             <a:r>
-              <a:rPr lang="en-US" sz="1200" b="1" spc="200" kern="0" dirty="0">
+              <a:rPr lang="en-US" sz="1200" b="1" dirty="0">
                 <a:solidFill>
                   <a:srgbClr val="FC4540"/>
                 </a:solidFill>
@@ -9742,7 +9742,7 @@
                 <a:ea typeface="Consolas" pitchFamily="34" charset="-122"/>
                 <a:cs typeface="Consolas" pitchFamily="34" charset="-120"/>
               </a:rPr>
-              <a:t>2 TRUTHS AND A LIE</a:t>
+              <a:t>2 Truths and a Lie</a:t>
             </a:r>
             <a:endParaRPr lang="en-US" sz="1200" dirty="0"/>
           </a:p>
@@ -10594,7 +10594,7 @@
               <a:buNone/>
             </a:pPr>
             <a:r>
-              <a:rPr lang="en-US" sz="1200" b="1" spc="200" kern="0" dirty="0">
+              <a:rPr lang="en-US" sz="1200" b="1" dirty="0">
                 <a:solidFill>
                   <a:srgbClr val="FFB600"/>
                 </a:solidFill>
@@ -10602,7 +10602,7 @@
                 <a:ea typeface="Consolas" pitchFamily="34" charset="-122"/>
                 <a:cs typeface="Consolas" pitchFamily="34" charset="-120"/>
               </a:rPr>
-              <a:t>WALT WHITMAN</a:t>
+              <a:t>Walt Whitman</a:t>
             </a:r>
             <a:endParaRPr lang="en-US" sz="1200" dirty="0"/>
           </a:p>
@@ -10924,7 +10924,7 @@
               <a:buNone/>
             </a:pPr>
             <a:r>
-              <a:rPr lang="en-US" sz="1200" b="1" spc="200" kern="0" dirty="0">
+              <a:rPr lang="en-US" sz="1200" b="1" dirty="0">
                 <a:solidFill>
                   <a:srgbClr val="FC4540"/>
                 </a:solidFill>
@@ -10932,7 +10932,7 @@
                 <a:ea typeface="Consolas" pitchFamily="34" charset="-122"/>
                 <a:cs typeface="Consolas" pitchFamily="34" charset="-120"/>
               </a:rPr>
-              <a:t>WHY DO WE WRITE?</a:t>
+              <a:t>Why do we write?</a:t>
             </a:r>
             <a:endParaRPr lang="en-US" sz="1200" dirty="0"/>
           </a:p>
